--- a/lecons/F3/22_FORM4_LESSON18_Action_of_Rivers.pptx
+++ b/lecons/F3/22_FORM4_LESSON18_Action_of_Rivers.pptx
@@ -52,9 +52,11 @@
     <p:sldId id="300" r:id="rId46"/>
     <p:sldId id="301" r:id="rId47"/>
     <p:sldId id="302" r:id="rId48"/>
+    <p:sldId id="303" r:id="rId49"/>
+    <p:sldId id="304" r:id="rId50"/>
   </p:sldIdLst>
   <p:notesMasterIdLst>
-    <p:notesMasterId r:id="rId49"/>
+    <p:notesMasterId r:id="rId51"/>
   </p:notesMasterIdLst>
   <p:sldSz cx="12192000" cy="6858000"/>
   <p:notesSz cx="6858000" cy="12192000"/>
@@ -636,7 +638,7 @@
           <a:p>
             <a:r>
               <a:rPr lang="en-US" dirty="0"/>
-              <a:t>Listen carefully to this situation from real life. The Benue begins on the Adamawa Plateau and flows into Nigeria. In Garoua, it is wide and slow and carries a lot of brown mud in the rainy season. Think about it, because I am going to ask you some questions.</a:t>
+              <a:t>Listen carefully to this situation from real life. The Benue begins on the Adamawa Plateau and flows into Nigeria. Near its source the water is fast, but in Garoua it is wide and slow and carries a lot of brown mud in the rainy season. Aminatou asks: "Why does the river change along its way, and how does it wear away the land?" Think about it, because I am going to ask you some questions.</a:t>
             </a:r>
             <a:endParaRPr lang="en-US" dirty="0"/>
           </a:p>
@@ -812,7 +814,7 @@
           <a:p>
             <a:r>
               <a:rPr lang="en-US" dirty="0"/>
-              <a:t>Good. We want to understand how the river changes from its start to its end.</a:t>
+              <a:t>Good. Aminatou does not know why a river changes from its source to its mouth, or how it wears away the land.</a:t>
             </a:r>
             <a:endParaRPr lang="en-US" dirty="0"/>
           </a:p>
@@ -1076,7 +1078,7 @@
           <a:p>
             <a:r>
               <a:rPr lang="en-US" dirty="0"/>
-              <a:t>Question 3: What does it carry? Think for a moment, then raise your hand to answer.</a:t>
+              <a:t>Question 3: What does the brown colour of the water show? Think for a moment, then raise your hand to answer.</a:t>
             </a:r>
             <a:endParaRPr lang="en-US" dirty="0"/>
           </a:p>
@@ -1164,7 +1166,7 @@
           <a:p>
             <a:r>
               <a:rPr lang="en-US" dirty="0"/>
-              <a:t>Good. Mud and sand.</a:t>
+              <a:t>Good. The river carries a lot of mud (its load).</a:t>
             </a:r>
             <a:endParaRPr lang="en-US" dirty="0"/>
           </a:p>
@@ -1604,7 +1606,7 @@
           <a:p>
             <a:r>
               <a:rPr lang="en-US" dirty="0"/>
-              <a:t>Here is the question for Activity 1: Where is the river steep? Where is it almost flat? Take one minute to think and write your answer in your rough notebook.</a:t>
+              <a:t>Here is the question for Activity 1: Where is the river steep? Take one minute to think and write your answer in your rough notebook.</a:t>
             </a:r>
             <a:endParaRPr lang="en-US" dirty="0"/>
           </a:p>
@@ -1692,7 +1694,7 @@
           <a:p>
             <a:r>
               <a:rPr lang="en-US" dirty="0"/>
-              <a:t>Let us check the answer together. Steep near the source; almost flat near the mouth.</a:t>
+              <a:t>Let us check the answer together. Near its source.</a:t>
             </a:r>
             <a:endParaRPr lang="en-US" dirty="0"/>
           </a:p>
@@ -1780,7 +1782,7 @@
           <a:p>
             <a:r>
               <a:rPr lang="en-US" dirty="0"/>
-              <a:t>Activity 2. Look carefully at this diagram: the four ways a river erodes. Observe every detail before I ask the question.</a:t>
+              <a:t>Here is the next question: Where is it almost flat? Take one minute to think and write your answer in your rough notebook.</a:t>
             </a:r>
             <a:endParaRPr lang="en-US" dirty="0"/>
           </a:p>
@@ -1868,7 +1870,7 @@
           <a:p>
             <a:r>
               <a:rPr lang="en-US" dirty="0"/>
-              <a:t>Here is the question for Activity 2: Name the four ways a river wears away its bed and banks. Take one minute to think and write your answer in your rough notebook.</a:t>
+              <a:t>Let us check the answer together. Near its mouth.</a:t>
             </a:r>
             <a:endParaRPr lang="en-US" dirty="0"/>
           </a:p>
@@ -1956,7 +1958,7 @@
           <a:p>
             <a:r>
               <a:rPr lang="en-US" dirty="0"/>
-              <a:t>Let us check the answer together. Hydraulic action, abrasion, attrition and solution.</a:t>
+              <a:t>Activity 2. Look carefully at this diagram: how a river erodes. Observe every detail before I ask the question.</a:t>
             </a:r>
             <a:endParaRPr lang="en-US" dirty="0"/>
           </a:p>
@@ -2044,7 +2046,7 @@
           <a:p>
             <a:r>
               <a:rPr lang="en-US" dirty="0"/>
-              <a:t>Activity 3. Look carefully at this picture: a muddy river seen from space. Observe every detail before I ask the question.</a:t>
+              <a:t>Here is the question for Activity 2: What happens to stones when they hit each other in the river? Take one minute to think and write your answer in your rough notebook.</a:t>
             </a:r>
             <a:endParaRPr lang="en-US" dirty="0"/>
           </a:p>
@@ -2132,7 +2134,7 @@
           <a:p>
             <a:r>
               <a:rPr lang="en-US" dirty="0"/>
-              <a:t>Here is the question for Activity 3: What does the brown colour show? Take one minute to think and write your answer in your rough notebook.</a:t>
+              <a:t>Let us check the answer together. They become smaller and rounder: this is attrition.</a:t>
             </a:r>
             <a:endParaRPr lang="en-US" dirty="0"/>
           </a:p>
@@ -2220,7 +2222,7 @@
           <a:p>
             <a:r>
               <a:rPr lang="en-US" dirty="0"/>
-              <a:t>Let us check the answer together. The river carries a lot of mud (its load).</a:t>
+              <a:t>Activity 3. Look carefully at this picture: a muddy river. Observe every detail before I ask the question.</a:t>
             </a:r>
             <a:endParaRPr lang="en-US" dirty="0"/>
           </a:p>
@@ -2308,7 +2310,7 @@
           <a:p>
             <a:r>
               <a:rPr lang="en-US" dirty="0"/>
-              <a:t>Now we are going to copy the board summary. Write the title and the headings neatly in your notebooks. I will give you enough time for each slide, so do not rush.</a:t>
+              <a:t>Here is the question for Activity 3: Where does the mud carried by this river come from? Take one minute to think and write your answer in your rough notebook.</a:t>
             </a:r>
             <a:endParaRPr lang="en-US" dirty="0"/>
           </a:p>
@@ -2396,7 +2398,7 @@
           <a:p>
             <a:r>
               <a:rPr lang="en-US" dirty="0"/>
-              <a:t>Let us copy the definitions. The key terms of this lesson are defined as follows. On this slide we have Source and Mouth. Write each point on a new line, with the key term first, and explain it in your own words when we revise. When you finish, we go to the next slide.</a:t>
+              <a:t>Let us check the answer together. From the soil and rock worn away from its bed, its banks and its basin.</a:t>
             </a:r>
             <a:endParaRPr lang="en-US" dirty="0"/>
           </a:p>
@@ -2572,7 +2574,7 @@
           <a:p>
             <a:r>
               <a:rPr lang="en-US" dirty="0"/>
-              <a:t>We continue with the definitions. On this slide we have Load. Write each point on a new line, with the key term first, and explain it in your own words when we revise.</a:t>
+              <a:t>Now we are going to copy the board summary. Write the title and the headings neatly in your notebooks. I will give you enough time for each slide, so do not rush.</a:t>
             </a:r>
             <a:endParaRPr lang="en-US" dirty="0"/>
           </a:p>
@@ -2660,7 +2662,7 @@
           <a:p>
             <a:r>
               <a:rPr lang="en-US" dirty="0"/>
-              <a:t>Let us copy The Long Profile of a River. The long profile is explained as follows. On this slide we have Long profile and Upper course. Write each point on a new line, with the key term first, and explain it in your own words when we revise. When you finish, we go to the next slide.</a:t>
+              <a:t>Let us copy the definitions. The key terms of this lesson are defined as follows. On this slide we have Long profile of a river and Source. Write each point on a new line, with the key term first, and explain it in your own words when we revise. When you finish, we go to the next slide.</a:t>
             </a:r>
             <a:endParaRPr lang="en-US" dirty="0"/>
           </a:p>
@@ -2748,7 +2750,7 @@
           <a:p>
             <a:r>
               <a:rPr lang="en-US" dirty="0"/>
-              <a:t>We continue with The Long Profile of a River. On this slide we have Middle course and Lower course. Write each point on a new line, with the key term first, and explain it in your own words when we revise.</a:t>
+              <a:t>We continue with the definitions. On this slide we have Mouth and Load. Write each point on a new line, with the key term first, and explain it in your own words when we revise.</a:t>
             </a:r>
             <a:endParaRPr lang="en-US" dirty="0"/>
           </a:p>
@@ -2836,7 +2838,7 @@
           <a:p>
             <a:r>
               <a:rPr lang="en-US" dirty="0"/>
-              <a:t>Now draw this illustration in your notebook: the long profile of a river. Give it a title and label it clearly.</a:t>
+              <a:t>Let us copy Illustration of the Long Profile. The long profile of a river has three courses. Copy the point on The upper course on the left, then draw the diagram on the right: the long profile of a river. Give it a title and label it clearly.</a:t>
             </a:r>
             <a:endParaRPr lang="en-US" dirty="0"/>
           </a:p>
@@ -2924,7 +2926,7 @@
           <a:p>
             <a:r>
               <a:rPr lang="en-US" dirty="0"/>
-              <a:t>Let us copy Mechanisms of River Erosion. Rivers erode through the following processes. On this slide we have Hydraulic action and Abrasion. Write each point on a new line, with the key term first, and explain it in your own words when we revise. When you finish, we go to the next slide.</a:t>
+              <a:t>We continue with Illustration of the Long Profile. On this slide we have The middle course and The lower course. Write each point on a new line, with the key term first, and explain it in your own words when we revise. When you finish, we go to the next slide.</a:t>
             </a:r>
             <a:endParaRPr lang="en-US" dirty="0"/>
           </a:p>
@@ -3012,7 +3014,7 @@
           <a:p>
             <a:r>
               <a:rPr lang="en-US" dirty="0"/>
-              <a:t>We continue with Mechanisms of River Erosion. On this slide we have Attrition and Solution. Write each point on a new line, with the key term first, and explain it in your own words when we revise.</a:t>
+              <a:t>We continue with Illustration of the Long Profile. On this slide we have Shape. Write each point on a new line, with the key term first, and explain it in your own words when we revise.</a:t>
             </a:r>
             <a:endParaRPr lang="en-US" dirty="0"/>
           </a:p>
@@ -3100,7 +3102,7 @@
           <a:p>
             <a:r>
               <a:rPr lang="en-US" dirty="0"/>
-              <a:t>Now let us check what you have understood. Question 1: Name the three courses of a river. Answer in your exercise book.</a:t>
+              <a:t>Let us copy Mechanisms of River Erosion. Rivers erode their bed and banks by the following mechanisms. Copy the point on Hydraulic action on the left, then draw the diagram on the right: mechanisms of river erosion. Give it a title and label it clearly.</a:t>
             </a:r>
             <a:endParaRPr lang="en-US" dirty="0"/>
           </a:p>
@@ -3188,7 +3190,7 @@
           <a:p>
             <a:r>
               <a:rPr lang="en-US" dirty="0"/>
-              <a:t>The expected answer is: upper, middle and lower course. If you got it right, well done.</a:t>
+              <a:t>We continue with Mechanisms of River Erosion. On this slide we have Abrasion (corrasion), Attrition and Solution (corrosion). Write each point on a new line, with the key term first, and explain it in your own words when we revise.</a:t>
             </a:r>
             <a:endParaRPr lang="en-US" dirty="0"/>
           </a:p>
@@ -3276,7 +3278,7 @@
           <a:p>
             <a:r>
               <a:rPr lang="en-US" dirty="0"/>
-              <a:t>Now let us check what you have understood. Question 2: What is attrition? Answer in your exercise book.</a:t>
+              <a:t>Now let us check what you have understood. Question 1: Name the three courses of a river. Answer in your exercise book.</a:t>
             </a:r>
             <a:endParaRPr lang="en-US" dirty="0"/>
           </a:p>
@@ -3364,7 +3366,7 @@
           <a:p>
             <a:r>
               <a:rPr lang="en-US" dirty="0"/>
-              <a:t>The expected answer is: stones hit each other and become smaller. If you got it right, well done.</a:t>
+              <a:t>The expected answer is: upper, middle and lower course. If you got it right, well done.</a:t>
             </a:r>
             <a:endParaRPr lang="en-US" dirty="0"/>
           </a:p>
@@ -3540,7 +3542,7 @@
           <a:p>
             <a:r>
               <a:rPr lang="en-US" dirty="0"/>
-              <a:t>For those who need more practice, fill in the blanks in your exercise book. The answers are: number 1, source; number 2, load; number 3, abrasion.</a:t>
+              <a:t>Now let us check what you have understood. Question 2: What is attrition? Answer in your exercise book.</a:t>
             </a:r>
             <a:endParaRPr lang="en-US" dirty="0"/>
           </a:p>
@@ -3628,7 +3630,7 @@
           <a:p>
             <a:r>
               <a:rPr lang="en-US" dirty="0"/>
-              <a:t>For your homework: Find a photo or a video of the Vina Falls or the Tello Falls near Ngaoundéré, or of the Kola Gorges near Guider. Describe the river and its valley in three sentences. We shall correct it at the beginning of our next lesson.</a:t>
+              <a:t>The expected answer is: stones hit each other and become smaller. If you got it right, well done.</a:t>
             </a:r>
             <a:endParaRPr lang="en-US" dirty="0"/>
           </a:p>
@@ -3716,7 +3718,7 @@
           <a:p>
             <a:r>
               <a:rPr lang="en-US" dirty="0"/>
-              <a:t>Our next lesson will be on Lesson 19: The Upper Course of a River. Thank you for your attention, and see you next time.</a:t>
+              <a:t>For those who need more practice, fill in the blanks in your exercise book. The answers are: number 1, source; number 2, load; number 3, abrasion.</a:t>
             </a:r>
             <a:endParaRPr lang="en-US" dirty="0"/>
           </a:p>
@@ -3804,7 +3806,7 @@
           <a:p>
             <a:r>
               <a:rPr lang="en-US" dirty="0"/>
-              <a:t>Let us play the bilingual game. I say a word in English, and you give me the French word. Then we do the reverse.</a:t>
+              <a:t>For your homework: Find a photo or a video of the Vina Falls or the Tello Falls near Ngaoundéré, or of the Kola Gorges near Guider. Describe the river and its valley in three sentences. We shall correct it at the beginning of our next lesson.</a:t>
             </a:r>
             <a:endParaRPr lang="en-US" dirty="0"/>
           </a:p>
@@ -3892,7 +3894,7 @@
           <a:p>
             <a:r>
               <a:rPr lang="en-US" dirty="0"/>
-              <a:t>I record this information in the official logbook of the class after the lesson.</a:t>
+              <a:t>Our next lesson will be on Lesson 19: The Upper Course of a River. Thank you for your attention, and see you next time.</a:t>
             </a:r>
             <a:endParaRPr lang="en-US" dirty="0"/>
           </a:p>
@@ -3980,7 +3982,7 @@
           <a:p>
             <a:r>
               <a:rPr lang="en-US" dirty="0"/>
-              <a:t>I complete the second page of the logbook: the matter taught, the evaluation, the homework and the attendance.</a:t>
+              <a:t>Let us play the bilingual game. I say a word in English, and you give me the French word. Then we do the reverse.</a:t>
             </a:r>
             <a:endParaRPr lang="en-US" dirty="0"/>
           </a:p>
@@ -4068,7 +4070,7 @@
           <a:p>
             <a:r>
               <a:rPr lang="en-US" dirty="0"/>
-              <a:t>This slide is for me, the teacher: it gives the timing of the lesson and what to do if the projector is not available.</a:t>
+              <a:t>I record this information in the official logbook of the class after the lesson.</a:t>
             </a:r>
             <a:endParaRPr lang="en-US" dirty="0"/>
           </a:p>
@@ -4156,7 +4158,7 @@
           <a:p>
             <a:r>
               <a:rPr lang="en-US" dirty="0"/>
-              <a:t>These are the references and picture credits used to prepare this lesson.</a:t>
+              <a:t>I complete the second page of the logbook: the matter taught, the evaluation, the homework and the attendance.</a:t>
             </a:r>
             <a:endParaRPr lang="en-US" dirty="0"/>
           </a:p>
@@ -4180,6 +4182,182 @@
             <a:fld id="{F7021451-1387-4CA6-816F-3879F97B5CBC}" type="slidenum">
               <a:rPr lang="en-US"/>
               <a:t>47</a:t>
+            </a:fld>
+            <a:endParaRPr lang="en-US"/>
+          </a:p>
+        </p:txBody>
+      </p:sp>
+    </p:spTree>
+    <p:extLst>
+      <p:ext uri="{BB962C8B-B14F-4D97-AF65-F5344CB8AC3E}">
+        <p14:creationId xmlns:p14="http://schemas.microsoft.com/office/powerpoint/2010/main" val="1024086991"/>
+      </p:ext>
+    </p:extLst>
+  </p:cSld>
+  <p:clrMapOvr>
+    <a:masterClrMapping/>
+  </p:clrMapOvr>
+</p:notes>
+</file>
+
+<file path=ppt/notesSlides/notesSlide48.xml><?xml version="1.0" encoding="utf-8"?>
+<p:notes xmlns:a="http://schemas.openxmlformats.org/drawingml/2006/main" xmlns:r="http://schemas.openxmlformats.org/officeDocument/2006/relationships" xmlns:p="http://schemas.openxmlformats.org/presentationml/2006/main">
+  <p:cSld>
+    <p:spTree>
+      <p:nvGrpSpPr>
+        <p:cNvPr id="1" name=""/>
+        <p:cNvGrpSpPr/>
+        <p:nvPr/>
+      </p:nvGrpSpPr>
+      <p:grpSpPr>
+        <a:xfrm>
+          <a:off x="0" y="0"/>
+          <a:ext cx="0" cy="0"/>
+          <a:chOff x="0" y="0"/>
+          <a:chExt cx="0" cy="0"/>
+        </a:xfrm>
+      </p:grpSpPr>
+      <p:sp>
+        <p:nvSpPr>
+          <p:cNvPr id="2" name="Slide Image Placeholder 1"/>
+          <p:cNvSpPr>
+            <a:spLocks noGrp="1" noRot="1" noChangeAspect="1"/>
+          </p:cNvSpPr>
+          <p:nvPr>
+            <p:ph type="sldImg"/>
+          </p:nvPr>
+        </p:nvSpPr>
+        <p:spPr/>
+      </p:sp>
+      <p:sp>
+        <p:nvSpPr>
+          <p:cNvPr id="3" name="Notes Placeholder 2"/>
+          <p:cNvSpPr>
+            <a:spLocks noGrp="1"/>
+          </p:cNvSpPr>
+          <p:nvPr>
+            <p:ph type="body" idx="1"/>
+          </p:nvPr>
+        </p:nvSpPr>
+        <p:spPr/>
+        <p:txBody>
+          <a:bodyPr/>
+          <a:lstStyle/>
+          <a:p>
+            <a:r>
+              <a:rPr lang="en-US" dirty="0"/>
+              <a:t>This slide is for me, the teacher: it gives the timing of the lesson and what to do if the projector is not available.</a:t>
+            </a:r>
+            <a:endParaRPr lang="en-US" dirty="0"/>
+          </a:p>
+        </p:txBody>
+      </p:sp>
+      <p:sp>
+        <p:nvSpPr>
+          <p:cNvPr id="4" name="Slide Number Placeholder 3"/>
+          <p:cNvSpPr>
+            <a:spLocks noGrp="1"/>
+          </p:cNvSpPr>
+          <p:nvPr>
+            <p:ph type="sldNum" sz="quarter" idx="10"/>
+          </p:nvPr>
+        </p:nvSpPr>
+        <p:spPr/>
+        <p:txBody>
+          <a:bodyPr/>
+          <a:lstStyle/>
+          <a:p>
+            <a:fld id="{F7021451-1387-4CA6-816F-3879F97B5CBC}" type="slidenum">
+              <a:rPr lang="en-US"/>
+              <a:t>48</a:t>
+            </a:fld>
+            <a:endParaRPr lang="en-US"/>
+          </a:p>
+        </p:txBody>
+      </p:sp>
+    </p:spTree>
+    <p:extLst>
+      <p:ext uri="{BB962C8B-B14F-4D97-AF65-F5344CB8AC3E}">
+        <p14:creationId xmlns:p14="http://schemas.microsoft.com/office/powerpoint/2010/main" val="1024086991"/>
+      </p:ext>
+    </p:extLst>
+  </p:cSld>
+  <p:clrMapOvr>
+    <a:masterClrMapping/>
+  </p:clrMapOvr>
+</p:notes>
+</file>
+
+<file path=ppt/notesSlides/notesSlide49.xml><?xml version="1.0" encoding="utf-8"?>
+<p:notes xmlns:a="http://schemas.openxmlformats.org/drawingml/2006/main" xmlns:r="http://schemas.openxmlformats.org/officeDocument/2006/relationships" xmlns:p="http://schemas.openxmlformats.org/presentationml/2006/main">
+  <p:cSld>
+    <p:spTree>
+      <p:nvGrpSpPr>
+        <p:cNvPr id="1" name=""/>
+        <p:cNvGrpSpPr/>
+        <p:nvPr/>
+      </p:nvGrpSpPr>
+      <p:grpSpPr>
+        <a:xfrm>
+          <a:off x="0" y="0"/>
+          <a:ext cx="0" cy="0"/>
+          <a:chOff x="0" y="0"/>
+          <a:chExt cx="0" cy="0"/>
+        </a:xfrm>
+      </p:grpSpPr>
+      <p:sp>
+        <p:nvSpPr>
+          <p:cNvPr id="2" name="Slide Image Placeholder 1"/>
+          <p:cNvSpPr>
+            <a:spLocks noGrp="1" noRot="1" noChangeAspect="1"/>
+          </p:cNvSpPr>
+          <p:nvPr>
+            <p:ph type="sldImg"/>
+          </p:nvPr>
+        </p:nvSpPr>
+        <p:spPr/>
+      </p:sp>
+      <p:sp>
+        <p:nvSpPr>
+          <p:cNvPr id="3" name="Notes Placeholder 2"/>
+          <p:cNvSpPr>
+            <a:spLocks noGrp="1"/>
+          </p:cNvSpPr>
+          <p:nvPr>
+            <p:ph type="body" idx="1"/>
+          </p:nvPr>
+        </p:nvSpPr>
+        <p:spPr/>
+        <p:txBody>
+          <a:bodyPr/>
+          <a:lstStyle/>
+          <a:p>
+            <a:r>
+              <a:rPr lang="en-US" dirty="0"/>
+              <a:t>These are the references and picture credits used to prepare this lesson.</a:t>
+            </a:r>
+            <a:endParaRPr lang="en-US" dirty="0"/>
+          </a:p>
+        </p:txBody>
+      </p:sp>
+      <p:sp>
+        <p:nvSpPr>
+          <p:cNvPr id="4" name="Slide Number Placeholder 3"/>
+          <p:cNvSpPr>
+            <a:spLocks noGrp="1"/>
+          </p:cNvSpPr>
+          <p:nvPr>
+            <p:ph type="sldNum" sz="quarter" idx="10"/>
+          </p:nvPr>
+        </p:nvSpPr>
+        <p:spPr/>
+        <p:txBody>
+          <a:bodyPr/>
+          <a:lstStyle/>
+          <a:p>
+            <a:fld id="{F7021451-1387-4CA6-816F-3879F97B5CBC}" type="slidenum">
+              <a:rPr lang="en-US"/>
+              <a:t>49</a:t>
             </a:fld>
             <a:endParaRPr lang="en-US"/>
           </a:p>
@@ -5976,7 +6154,7 @@
         <p:spPr>
           <a:xfrm>
             <a:off x="0" y="658368"/>
-            <a:ext cx="5120640" cy="5833872"/>
+            <a:ext cx="1463040" cy="5833872"/>
           </a:xfrm>
           <a:prstGeom prst="rect">
             <a:avLst/>
@@ -5991,8 +6169,8 @@
         </p:nvSpPr>
         <p:spPr>
           <a:xfrm>
-            <a:off x="5349240" y="1005840"/>
-            <a:ext cx="6522415" cy="731520"/>
+            <a:off x="1691640" y="1005840"/>
+            <a:ext cx="10180015" cy="731520"/>
           </a:xfrm>
           <a:prstGeom prst="rect">
             <a:avLst/>
@@ -6032,8 +6210,8 @@
         </p:nvSpPr>
         <p:spPr>
           <a:xfrm>
-            <a:off x="5349240" y="1783080"/>
-            <a:ext cx="6522415" cy="4663440"/>
+            <a:off x="1691640" y="1783080"/>
+            <a:ext cx="10180015" cy="4663440"/>
           </a:xfrm>
           <a:prstGeom prst="rect">
             <a:avLst/>
@@ -6060,7 +6238,7 @@
                 <a:ea typeface="Times New Roman" pitchFamily="34" charset="-122"/>
                 <a:cs typeface="Times New Roman" pitchFamily="34" charset="-120"/>
               </a:rPr>
-              <a:t>The Benue begins on the Adamawa Plateau and flows into Nigeria. In Garoua, it is wide and slow and carries a lot of brown mud in the rainy season.</a:t>
+              <a:t>The Benue begins on the Adamawa Plateau and flows into Nigeria. Near its source the water is fast, but in Garoua it is wide and slow and carries a lot of brown mud in the rainy season. Aminatou asks: "Why does the river change along its way, and how does it wear away the land?"</a:t>
             </a:r>
             <a:endParaRPr lang="en-US" sz="4000" dirty="0"/>
           </a:p>
@@ -6498,7 +6676,7 @@
                 <a:ea typeface="Times New Roman" pitchFamily="34" charset="-122"/>
                 <a:cs typeface="Times New Roman" pitchFamily="34" charset="-120"/>
               </a:rPr>
-              <a:t>We want to understand how the river changes from its start to its end.</a:t>
+              <a:t>Aminatou does not know why a river changes from its source to its mouth, or how it wears away the land.</a:t>
             </a:r>
             <a:endParaRPr lang="en-US" sz="4000" dirty="0"/>
           </a:p>
@@ -7155,7 +7333,7 @@
                 <a:ea typeface="Times New Roman" pitchFamily="34" charset="-122"/>
                 <a:cs typeface="Times New Roman" pitchFamily="34" charset="-120"/>
               </a:rPr>
-              <a:t>What does it carry?</a:t>
+              <a:t>What does the brown colour of the water show?</a:t>
             </a:r>
             <a:endParaRPr lang="en-US" sz="4000" dirty="0"/>
           </a:p>
@@ -7374,7 +7552,7 @@
                 <a:ea typeface="Times New Roman" pitchFamily="34" charset="-122"/>
                 <a:cs typeface="Times New Roman" pitchFamily="34" charset="-120"/>
               </a:rPr>
-              <a:t>Mud and sand.</a:t>
+              <a:t>The river carries a lot of mud (its load).</a:t>
             </a:r>
             <a:endParaRPr lang="en-US" sz="4000" dirty="0"/>
           </a:p>
@@ -8798,7 +8976,7 @@
                 <a:ea typeface="Times New Roman" pitchFamily="34" charset="-122"/>
                 <a:cs typeface="Times New Roman" pitchFamily="34" charset="-120"/>
               </a:rPr>
-              <a:t>Activity 1: Question</a:t>
+              <a:t>Activity 1: Question 1</a:t>
             </a:r>
             <a:endParaRPr lang="en-US" sz="3600" dirty="0"/>
           </a:p>
@@ -8840,7 +9018,7 @@
                 <a:ea typeface="Times New Roman" pitchFamily="34" charset="-122"/>
                 <a:cs typeface="Times New Roman" pitchFamily="34" charset="-120"/>
               </a:rPr>
-              <a:t>Where is the river steep? Where is it almost flat?</a:t>
+              <a:t>Where is the river steep?</a:t>
             </a:r>
             <a:endParaRPr lang="en-US" sz="4000" dirty="0"/>
           </a:p>
@@ -9017,7 +9195,7 @@
                 <a:ea typeface="Times New Roman" pitchFamily="34" charset="-122"/>
                 <a:cs typeface="Times New Roman" pitchFamily="34" charset="-120"/>
               </a:rPr>
-              <a:t>Activity 1: Answer</a:t>
+              <a:t>Activity 1: Answer 1</a:t>
             </a:r>
             <a:endParaRPr lang="en-US" sz="3600" dirty="0"/>
           </a:p>
@@ -9059,7 +9237,7 @@
                 <a:ea typeface="Times New Roman" pitchFamily="34" charset="-122"/>
                 <a:cs typeface="Times New Roman" pitchFamily="34" charset="-120"/>
               </a:rPr>
-              <a:t>Steep near the source; almost flat near the mouth.</a:t>
+              <a:t>Near its source.</a:t>
             </a:r>
             <a:endParaRPr lang="en-US" sz="4000" dirty="0"/>
           </a:p>
@@ -9171,54 +9349,15 @@
                 <a:ea typeface="Calibri" pitchFamily="34" charset="-122"/>
                 <a:cs typeface="Calibri" pitchFamily="34" charset="-120"/>
               </a:rPr>
-              <a:t>2. RIVER EROSION</a:t>
+              <a:t>1. THE LONG PROFILE</a:t>
             </a:r>
             <a:endParaRPr lang="en-US" sz="1400" dirty="0"/>
-          </a:p>
-        </p:txBody>
-      </p:sp>
-      <p:sp>
-        <p:nvSpPr>
-          <p:cNvPr id="3" name="Text 1"/>
-          <p:cNvSpPr/>
-          <p:nvPr/>
-        </p:nvSpPr>
-        <p:spPr>
-          <a:xfrm>
-            <a:off x="457200" y="1005840"/>
-            <a:ext cx="11277295" cy="731520"/>
-          </a:xfrm>
-          <a:prstGeom prst="rect">
-            <a:avLst/>
-          </a:prstGeom>
-          <a:noFill/>
-          <a:ln/>
-        </p:spPr>
-        <p:txBody>
-          <a:bodyPr wrap="square" lIns="0" tIns="0" rIns="0" bIns="0" rtlCol="0" anchor="ctr"/>
-          <a:lstStyle/>
-          <a:p>
-            <a:pPr algn="ctr" indent="0" marL="0">
-              <a:buNone/>
-            </a:pPr>
-            <a:r>
-              <a:rPr lang="en-US" sz="3600" b="1" dirty="0">
-                <a:solidFill>
-                  <a:srgbClr val="990011"/>
-                </a:solidFill>
-                <a:latin typeface="Times New Roman" pitchFamily="34" charset="0"/>
-                <a:ea typeface="Times New Roman" pitchFamily="34" charset="-122"/>
-                <a:cs typeface="Times New Roman" pitchFamily="34" charset="-120"/>
-              </a:rPr>
-              <a:t>Activity 2</a:t>
-            </a:r>
-            <a:endParaRPr lang="en-US" sz="3600" dirty="0"/>
           </a:p>
         </p:txBody>
       </p:sp>
       <p:pic>
         <p:nvPicPr>
-          <p:cNvPr id="4" name="Image 0" descr="/home/claude/f4/img/v2/river_erosion_big.png">    </p:cNvPr>
+          <p:cNvPr id="3" name="Image 0" descr="/home/claude/f4/img/minesec_sheet.png">    </p:cNvPr>
           <p:cNvPicPr>
             <a:picLocks noChangeAspect="1"/>
           </p:cNvPicPr>
@@ -9232,8 +9371,8 @@
         </p:blipFill>
         <p:spPr>
           <a:xfrm>
-            <a:off x="629930" y="1783080"/>
-            <a:ext cx="10931835" cy="4270248"/>
+            <a:off x="0" y="658368"/>
+            <a:ext cx="5120640" cy="5833872"/>
           </a:xfrm>
           <a:prstGeom prst="rect">
             <a:avLst/>
@@ -9242,14 +9381,14 @@
       </p:pic>
       <p:sp>
         <p:nvSpPr>
-          <p:cNvPr id="5" name="Text 2"/>
+          <p:cNvPr id="4" name="Text 1"/>
           <p:cNvSpPr/>
           <p:nvPr/>
         </p:nvSpPr>
         <p:spPr>
           <a:xfrm>
-            <a:off x="457200" y="6089904"/>
-            <a:ext cx="11277295" cy="347472"/>
+            <a:off x="5349240" y="1005840"/>
+            <a:ext cx="6522415" cy="731520"/>
           </a:xfrm>
           <a:prstGeom prst="rect">
             <a:avLst/>
@@ -9258,24 +9397,68 @@
           <a:ln/>
         </p:spPr>
         <p:txBody>
-          <a:bodyPr wrap="square" lIns="0" tIns="0" rIns="0" bIns="0" rtlCol="0" anchor="ctr"/>
+          <a:bodyPr wrap="square" lIns="0" tIns="0" rIns="0" bIns="0" rtlCol="0" anchor="ctr">
+            <a:normAutofit/>
+          </a:bodyPr>
           <a:lstStyle/>
           <a:p>
             <a:pPr algn="ctr" indent="0" marL="0">
               <a:buNone/>
             </a:pPr>
             <a:r>
-              <a:rPr lang="en-US" sz="1800" i="1" dirty="0">
-                <a:solidFill>
-                  <a:srgbClr val="555555"/>
+              <a:rPr lang="en-US" sz="3600" b="1" dirty="0">
+                <a:solidFill>
+                  <a:srgbClr val="990011"/>
                 </a:solidFill>
                 <a:latin typeface="Times New Roman" pitchFamily="34" charset="0"/>
                 <a:ea typeface="Times New Roman" pitchFamily="34" charset="-122"/>
                 <a:cs typeface="Times New Roman" pitchFamily="34" charset="-120"/>
               </a:rPr>
-              <a:t>The four ways a river erodes.</a:t>
-            </a:r>
-            <a:endParaRPr lang="en-US" sz="1800" dirty="0"/>
+              <a:t>Activity 1: Question 2</a:t>
+            </a:r>
+            <a:endParaRPr lang="en-US" sz="3600" dirty="0"/>
+          </a:p>
+        </p:txBody>
+      </p:sp>
+      <p:sp>
+        <p:nvSpPr>
+          <p:cNvPr id="5" name="Text 2"/>
+          <p:cNvSpPr/>
+          <p:nvPr/>
+        </p:nvSpPr>
+        <p:spPr>
+          <a:xfrm>
+            <a:off x="5349240" y="1783080"/>
+            <a:ext cx="6522415" cy="4663440"/>
+          </a:xfrm>
+          <a:prstGeom prst="rect">
+            <a:avLst/>
+          </a:prstGeom>
+          <a:noFill/>
+          <a:ln/>
+        </p:spPr>
+        <p:txBody>
+          <a:bodyPr wrap="square" lIns="0" tIns="0" rIns="0" bIns="0" rtlCol="0" anchor="t"/>
+          <a:lstStyle/>
+          <a:p>
+            <a:pPr algn="l" indent="0" marL="0">
+              <a:spcAft>
+                <a:spcPts val="800"/>
+              </a:spcAft>
+              <a:buNone/>
+            </a:pPr>
+            <a:r>
+              <a:rPr lang="en-US" sz="4000" dirty="0">
+                <a:solidFill>
+                  <a:srgbClr val="111111"/>
+                </a:solidFill>
+                <a:latin typeface="Times New Roman" pitchFamily="34" charset="0"/>
+                <a:ea typeface="Times New Roman" pitchFamily="34" charset="-122"/>
+                <a:cs typeface="Times New Roman" pitchFamily="34" charset="-120"/>
+              </a:rPr>
+              <a:t>Where is it almost flat?</a:t>
+            </a:r>
+            <a:endParaRPr lang="en-US" sz="4000" dirty="0"/>
           </a:p>
         </p:txBody>
       </p:sp>
@@ -9385,7 +9568,7 @@
                 <a:ea typeface="Calibri" pitchFamily="34" charset="-122"/>
                 <a:cs typeface="Calibri" pitchFamily="34" charset="-120"/>
               </a:rPr>
-              <a:t>2. RIVER EROSION</a:t>
+              <a:t>1. THE LONG PROFILE</a:t>
             </a:r>
             <a:endParaRPr lang="en-US" sz="1400" dirty="0"/>
           </a:p>
@@ -9450,7 +9633,7 @@
                 <a:ea typeface="Times New Roman" pitchFamily="34" charset="-122"/>
                 <a:cs typeface="Times New Roman" pitchFamily="34" charset="-120"/>
               </a:rPr>
-              <a:t>Activity 2: Question</a:t>
+              <a:t>Activity 1: Answer 2</a:t>
             </a:r>
             <a:endParaRPr lang="en-US" sz="3600" dirty="0"/>
           </a:p>
@@ -9492,7 +9675,7 @@
                 <a:ea typeface="Times New Roman" pitchFamily="34" charset="-122"/>
                 <a:cs typeface="Times New Roman" pitchFamily="34" charset="-120"/>
               </a:rPr>
-              <a:t>Name the four ways a river wears away its bed and banks.</a:t>
+              <a:t>Near its mouth.</a:t>
             </a:r>
             <a:endParaRPr lang="en-US" sz="4000" dirty="0"/>
           </a:p>
@@ -9604,15 +9787,54 @@
                 <a:ea typeface="Calibri" pitchFamily="34" charset="-122"/>
                 <a:cs typeface="Calibri" pitchFamily="34" charset="-120"/>
               </a:rPr>
-              <a:t>2. RIVER EROSION</a:t>
+              <a:t>2. MECHANISMS OF RIVER EROSION</a:t>
             </a:r>
             <a:endParaRPr lang="en-US" sz="1400" dirty="0"/>
+          </a:p>
+        </p:txBody>
+      </p:sp>
+      <p:sp>
+        <p:nvSpPr>
+          <p:cNvPr id="3" name="Text 1"/>
+          <p:cNvSpPr/>
+          <p:nvPr/>
+        </p:nvSpPr>
+        <p:spPr>
+          <a:xfrm>
+            <a:off x="457200" y="1005840"/>
+            <a:ext cx="11277295" cy="731520"/>
+          </a:xfrm>
+          <a:prstGeom prst="rect">
+            <a:avLst/>
+          </a:prstGeom>
+          <a:noFill/>
+          <a:ln/>
+        </p:spPr>
+        <p:txBody>
+          <a:bodyPr wrap="square" lIns="0" tIns="0" rIns="0" bIns="0" rtlCol="0" anchor="ctr"/>
+          <a:lstStyle/>
+          <a:p>
+            <a:pPr algn="ctr" indent="0" marL="0">
+              <a:buNone/>
+            </a:pPr>
+            <a:r>
+              <a:rPr lang="en-US" sz="3600" b="1" dirty="0">
+                <a:solidFill>
+                  <a:srgbClr val="990011"/>
+                </a:solidFill>
+                <a:latin typeface="Times New Roman" pitchFamily="34" charset="0"/>
+                <a:ea typeface="Times New Roman" pitchFamily="34" charset="-122"/>
+                <a:cs typeface="Times New Roman" pitchFamily="34" charset="-120"/>
+              </a:rPr>
+              <a:t>Activity 2</a:t>
+            </a:r>
+            <a:endParaRPr lang="en-US" sz="3600" dirty="0"/>
           </a:p>
         </p:txBody>
       </p:sp>
       <p:pic>
         <p:nvPicPr>
-          <p:cNvPr id="3" name="Image 0" descr="/home/claude/f4/img/minesec_sheet.png">    </p:cNvPr>
+          <p:cNvPr id="4" name="Image 0" descr="/home/claude/f4/img/v2/river_erosion_big.png">    </p:cNvPr>
           <p:cNvPicPr>
             <a:picLocks noChangeAspect="1"/>
           </p:cNvPicPr>
@@ -9626,8 +9848,8 @@
         </p:blipFill>
         <p:spPr>
           <a:xfrm>
-            <a:off x="0" y="658368"/>
-            <a:ext cx="5120640" cy="5833872"/>
+            <a:off x="629930" y="1783080"/>
+            <a:ext cx="10931835" cy="4270248"/>
           </a:xfrm>
           <a:prstGeom prst="rect">
             <a:avLst/>
@@ -9636,14 +9858,14 @@
       </p:pic>
       <p:sp>
         <p:nvSpPr>
-          <p:cNvPr id="4" name="Text 1"/>
+          <p:cNvPr id="5" name="Text 2"/>
           <p:cNvSpPr/>
           <p:nvPr/>
         </p:nvSpPr>
         <p:spPr>
           <a:xfrm>
-            <a:off x="5349240" y="1005840"/>
-            <a:ext cx="6522415" cy="731520"/>
+            <a:off x="457200" y="6089904"/>
+            <a:ext cx="11277295" cy="347472"/>
           </a:xfrm>
           <a:prstGeom prst="rect">
             <a:avLst/>
@@ -9652,68 +9874,24 @@
           <a:ln/>
         </p:spPr>
         <p:txBody>
-          <a:bodyPr wrap="square" lIns="0" tIns="0" rIns="0" bIns="0" rtlCol="0" anchor="ctr">
-            <a:normAutofit/>
-          </a:bodyPr>
+          <a:bodyPr wrap="square" lIns="0" tIns="0" rIns="0" bIns="0" rtlCol="0" anchor="ctr"/>
           <a:lstStyle/>
           <a:p>
             <a:pPr algn="ctr" indent="0" marL="0">
               <a:buNone/>
             </a:pPr>
             <a:r>
-              <a:rPr lang="en-US" sz="3600" b="1" dirty="0">
-                <a:solidFill>
-                  <a:srgbClr val="990011"/>
+              <a:rPr lang="en-US" sz="1800" i="1" dirty="0">
+                <a:solidFill>
+                  <a:srgbClr val="555555"/>
                 </a:solidFill>
                 <a:latin typeface="Times New Roman" pitchFamily="34" charset="0"/>
                 <a:ea typeface="Times New Roman" pitchFamily="34" charset="-122"/>
                 <a:cs typeface="Times New Roman" pitchFamily="34" charset="-120"/>
               </a:rPr>
-              <a:t>Activity 2: Answer</a:t>
-            </a:r>
-            <a:endParaRPr lang="en-US" sz="3600" dirty="0"/>
-          </a:p>
-        </p:txBody>
-      </p:sp>
-      <p:sp>
-        <p:nvSpPr>
-          <p:cNvPr id="5" name="Text 2"/>
-          <p:cNvSpPr/>
-          <p:nvPr/>
-        </p:nvSpPr>
-        <p:spPr>
-          <a:xfrm>
-            <a:off x="5349240" y="1783080"/>
-            <a:ext cx="6522415" cy="4663440"/>
-          </a:xfrm>
-          <a:prstGeom prst="rect">
-            <a:avLst/>
-          </a:prstGeom>
-          <a:noFill/>
-          <a:ln/>
-        </p:spPr>
-        <p:txBody>
-          <a:bodyPr wrap="square" lIns="0" tIns="0" rIns="0" bIns="0" rtlCol="0" anchor="t"/>
-          <a:lstStyle/>
-          <a:p>
-            <a:pPr algn="l" indent="0" marL="0">
-              <a:spcAft>
-                <a:spcPts val="800"/>
-              </a:spcAft>
-              <a:buNone/>
-            </a:pPr>
-            <a:r>
-              <a:rPr lang="en-US" sz="4000" dirty="0">
-                <a:solidFill>
-                  <a:srgbClr val="111111"/>
-                </a:solidFill>
-                <a:latin typeface="Times New Roman" pitchFamily="34" charset="0"/>
-                <a:ea typeface="Times New Roman" pitchFamily="34" charset="-122"/>
-                <a:cs typeface="Times New Roman" pitchFamily="34" charset="-120"/>
-              </a:rPr>
-              <a:t>Hydraulic action, abrasion, attrition and solution.</a:t>
-            </a:r>
-            <a:endParaRPr lang="en-US" sz="4000" dirty="0"/>
+              <a:t>How a river erodes.</a:t>
+            </a:r>
+            <a:endParaRPr lang="en-US" sz="1800" dirty="0"/>
           </a:p>
         </p:txBody>
       </p:sp>
@@ -9823,54 +10001,15 @@
                 <a:ea typeface="Calibri" pitchFamily="34" charset="-122"/>
                 <a:cs typeface="Calibri" pitchFamily="34" charset="-120"/>
               </a:rPr>
-              <a:t>2. RIVER EROSION</a:t>
+              <a:t>2. MECHANISMS OF RIVER EROSION</a:t>
             </a:r>
             <a:endParaRPr lang="en-US" sz="1400" dirty="0"/>
-          </a:p>
-        </p:txBody>
-      </p:sp>
-      <p:sp>
-        <p:nvSpPr>
-          <p:cNvPr id="3" name="Text 1"/>
-          <p:cNvSpPr/>
-          <p:nvPr/>
-        </p:nvSpPr>
-        <p:spPr>
-          <a:xfrm>
-            <a:off x="457200" y="1005840"/>
-            <a:ext cx="11277295" cy="731520"/>
-          </a:xfrm>
-          <a:prstGeom prst="rect">
-            <a:avLst/>
-          </a:prstGeom>
-          <a:noFill/>
-          <a:ln/>
-        </p:spPr>
-        <p:txBody>
-          <a:bodyPr wrap="square" lIns="0" tIns="0" rIns="0" bIns="0" rtlCol="0" anchor="ctr"/>
-          <a:lstStyle/>
-          <a:p>
-            <a:pPr algn="ctr" indent="0" marL="0">
-              <a:buNone/>
-            </a:pPr>
-            <a:r>
-              <a:rPr lang="en-US" sz="3600" b="1" dirty="0">
-                <a:solidFill>
-                  <a:srgbClr val="990011"/>
-                </a:solidFill>
-                <a:latin typeface="Times New Roman" pitchFamily="34" charset="0"/>
-                <a:ea typeface="Times New Roman" pitchFamily="34" charset="-122"/>
-                <a:cs typeface="Times New Roman" pitchFamily="34" charset="-120"/>
-              </a:rPr>
-              <a:t>Activity 3</a:t>
-            </a:r>
-            <a:endParaRPr lang="en-US" sz="3600" dirty="0"/>
           </a:p>
         </p:txBody>
       </p:sp>
       <p:pic>
         <p:nvPicPr>
-          <p:cNvPr id="4" name="Image 0" descr="/home/claude/f4/img/v2/f4_muddyriver.jpg">    </p:cNvPr>
+          <p:cNvPr id="3" name="Image 0" descr="/home/claude/f4/img/minesec_sheet.png">    </p:cNvPr>
           <p:cNvPicPr>
             <a:picLocks noChangeAspect="1"/>
           </p:cNvPicPr>
@@ -9884,8 +10023,8 @@
         </p:blipFill>
         <p:spPr>
           <a:xfrm>
-            <a:off x="2250369" y="1783080"/>
-            <a:ext cx="7690957" cy="4270248"/>
+            <a:off x="0" y="658368"/>
+            <a:ext cx="5120640" cy="5833872"/>
           </a:xfrm>
           <a:prstGeom prst="rect">
             <a:avLst/>
@@ -9894,14 +10033,14 @@
       </p:pic>
       <p:sp>
         <p:nvSpPr>
-          <p:cNvPr id="5" name="Text 2"/>
+          <p:cNvPr id="4" name="Text 1"/>
           <p:cNvSpPr/>
           <p:nvPr/>
         </p:nvSpPr>
         <p:spPr>
           <a:xfrm>
-            <a:off x="457200" y="6089904"/>
-            <a:ext cx="11277295" cy="347472"/>
+            <a:off x="5349240" y="1005840"/>
+            <a:ext cx="6522415" cy="731520"/>
           </a:xfrm>
           <a:prstGeom prst="rect">
             <a:avLst/>
@@ -9910,24 +10049,68 @@
           <a:ln/>
         </p:spPr>
         <p:txBody>
-          <a:bodyPr wrap="square" lIns="0" tIns="0" rIns="0" bIns="0" rtlCol="0" anchor="ctr"/>
+          <a:bodyPr wrap="square" lIns="0" tIns="0" rIns="0" bIns="0" rtlCol="0" anchor="ctr">
+            <a:normAutofit/>
+          </a:bodyPr>
           <a:lstStyle/>
           <a:p>
             <a:pPr algn="ctr" indent="0" marL="0">
               <a:buNone/>
             </a:pPr>
             <a:r>
-              <a:rPr lang="en-US" sz="1800" i="1" dirty="0">
-                <a:solidFill>
-                  <a:srgbClr val="555555"/>
+              <a:rPr lang="en-US" sz="3600" b="1" dirty="0">
+                <a:solidFill>
+                  <a:srgbClr val="990011"/>
                 </a:solidFill>
                 <a:latin typeface="Times New Roman" pitchFamily="34" charset="0"/>
                 <a:ea typeface="Times New Roman" pitchFamily="34" charset="-122"/>
                 <a:cs typeface="Times New Roman" pitchFamily="34" charset="-120"/>
               </a:rPr>
-              <a:t>A muddy river seen from space.</a:t>
-            </a:r>
-            <a:endParaRPr lang="en-US" sz="1800" dirty="0"/>
+              <a:t>Activity 2: Question</a:t>
+            </a:r>
+            <a:endParaRPr lang="en-US" sz="3600" dirty="0"/>
+          </a:p>
+        </p:txBody>
+      </p:sp>
+      <p:sp>
+        <p:nvSpPr>
+          <p:cNvPr id="5" name="Text 2"/>
+          <p:cNvSpPr/>
+          <p:nvPr/>
+        </p:nvSpPr>
+        <p:spPr>
+          <a:xfrm>
+            <a:off x="5349240" y="1783080"/>
+            <a:ext cx="6522415" cy="4663440"/>
+          </a:xfrm>
+          <a:prstGeom prst="rect">
+            <a:avLst/>
+          </a:prstGeom>
+          <a:noFill/>
+          <a:ln/>
+        </p:spPr>
+        <p:txBody>
+          <a:bodyPr wrap="square" lIns="0" tIns="0" rIns="0" bIns="0" rtlCol="0" anchor="t"/>
+          <a:lstStyle/>
+          <a:p>
+            <a:pPr algn="l" indent="0" marL="0">
+              <a:spcAft>
+                <a:spcPts val="800"/>
+              </a:spcAft>
+              <a:buNone/>
+            </a:pPr>
+            <a:r>
+              <a:rPr lang="en-US" sz="4000" dirty="0">
+                <a:solidFill>
+                  <a:srgbClr val="111111"/>
+                </a:solidFill>
+                <a:latin typeface="Times New Roman" pitchFamily="34" charset="0"/>
+                <a:ea typeface="Times New Roman" pitchFamily="34" charset="-122"/>
+                <a:cs typeface="Times New Roman" pitchFamily="34" charset="-120"/>
+              </a:rPr>
+              <a:t>What happens to stones when they hit each other in the river?</a:t>
+            </a:r>
+            <a:endParaRPr lang="en-US" sz="4000" dirty="0"/>
           </a:p>
         </p:txBody>
       </p:sp>
@@ -10037,7 +10220,7 @@
                 <a:ea typeface="Calibri" pitchFamily="34" charset="-122"/>
                 <a:cs typeface="Calibri" pitchFamily="34" charset="-120"/>
               </a:rPr>
-              <a:t>2. RIVER EROSION</a:t>
+              <a:t>2. MECHANISMS OF RIVER EROSION</a:t>
             </a:r>
             <a:endParaRPr lang="en-US" sz="1400" dirty="0"/>
           </a:p>
@@ -10102,7 +10285,7 @@
                 <a:ea typeface="Times New Roman" pitchFamily="34" charset="-122"/>
                 <a:cs typeface="Times New Roman" pitchFamily="34" charset="-120"/>
               </a:rPr>
-              <a:t>Activity 3: Question</a:t>
+              <a:t>Activity 2: Answer</a:t>
             </a:r>
             <a:endParaRPr lang="en-US" sz="3600" dirty="0"/>
           </a:p>
@@ -10144,7 +10327,7 @@
                 <a:ea typeface="Times New Roman" pitchFamily="34" charset="-122"/>
                 <a:cs typeface="Times New Roman" pitchFamily="34" charset="-120"/>
               </a:rPr>
-              <a:t>What does the brown colour show?</a:t>
+              <a:t>They become smaller and rounder: this is attrition.</a:t>
             </a:r>
             <a:endParaRPr lang="en-US" sz="4000" dirty="0"/>
           </a:p>
@@ -10256,15 +10439,54 @@
                 <a:ea typeface="Calibri" pitchFamily="34" charset="-122"/>
                 <a:cs typeface="Calibri" pitchFamily="34" charset="-120"/>
               </a:rPr>
-              <a:t>2. RIVER EROSION</a:t>
+              <a:t>2. MECHANISMS OF RIVER EROSION</a:t>
             </a:r>
             <a:endParaRPr lang="en-US" sz="1400" dirty="0"/>
+          </a:p>
+        </p:txBody>
+      </p:sp>
+      <p:sp>
+        <p:nvSpPr>
+          <p:cNvPr id="3" name="Text 1"/>
+          <p:cNvSpPr/>
+          <p:nvPr/>
+        </p:nvSpPr>
+        <p:spPr>
+          <a:xfrm>
+            <a:off x="457200" y="1005840"/>
+            <a:ext cx="11277295" cy="731520"/>
+          </a:xfrm>
+          <a:prstGeom prst="rect">
+            <a:avLst/>
+          </a:prstGeom>
+          <a:noFill/>
+          <a:ln/>
+        </p:spPr>
+        <p:txBody>
+          <a:bodyPr wrap="square" lIns="0" tIns="0" rIns="0" bIns="0" rtlCol="0" anchor="ctr"/>
+          <a:lstStyle/>
+          <a:p>
+            <a:pPr algn="ctr" indent="0" marL="0">
+              <a:buNone/>
+            </a:pPr>
+            <a:r>
+              <a:rPr lang="en-US" sz="3600" b="1" dirty="0">
+                <a:solidFill>
+                  <a:srgbClr val="990011"/>
+                </a:solidFill>
+                <a:latin typeface="Times New Roman" pitchFamily="34" charset="0"/>
+                <a:ea typeface="Times New Roman" pitchFamily="34" charset="-122"/>
+                <a:cs typeface="Times New Roman" pitchFamily="34" charset="-120"/>
+              </a:rPr>
+              <a:t>Activity 3</a:t>
+            </a:r>
+            <a:endParaRPr lang="en-US" sz="3600" dirty="0"/>
           </a:p>
         </p:txBody>
       </p:sp>
       <p:pic>
         <p:nvPicPr>
-          <p:cNvPr id="3" name="Image 0" descr="/home/claude/f4/img/minesec_sheet.png">    </p:cNvPr>
+          <p:cNvPr id="4" name="Image 0" descr="/home/claude/f4/img/v2/f4_muddyriver.jpg">    </p:cNvPr>
           <p:cNvPicPr>
             <a:picLocks noChangeAspect="1"/>
           </p:cNvPicPr>
@@ -10278,8 +10500,8 @@
         </p:blipFill>
         <p:spPr>
           <a:xfrm>
-            <a:off x="0" y="658368"/>
-            <a:ext cx="5120640" cy="5833872"/>
+            <a:off x="2250369" y="1783080"/>
+            <a:ext cx="7690957" cy="4270248"/>
           </a:xfrm>
           <a:prstGeom prst="rect">
             <a:avLst/>
@@ -10288,14 +10510,14 @@
       </p:pic>
       <p:sp>
         <p:nvSpPr>
-          <p:cNvPr id="4" name="Text 1"/>
+          <p:cNvPr id="5" name="Text 2"/>
           <p:cNvSpPr/>
           <p:nvPr/>
         </p:nvSpPr>
         <p:spPr>
           <a:xfrm>
-            <a:off x="5349240" y="1005840"/>
-            <a:ext cx="6522415" cy="731520"/>
+            <a:off x="457200" y="6089904"/>
+            <a:ext cx="11277295" cy="347472"/>
           </a:xfrm>
           <a:prstGeom prst="rect">
             <a:avLst/>
@@ -10304,68 +10526,24 @@
           <a:ln/>
         </p:spPr>
         <p:txBody>
-          <a:bodyPr wrap="square" lIns="0" tIns="0" rIns="0" bIns="0" rtlCol="0" anchor="ctr">
-            <a:normAutofit/>
-          </a:bodyPr>
+          <a:bodyPr wrap="square" lIns="0" tIns="0" rIns="0" bIns="0" rtlCol="0" anchor="ctr"/>
           <a:lstStyle/>
           <a:p>
             <a:pPr algn="ctr" indent="0" marL="0">
               <a:buNone/>
             </a:pPr>
             <a:r>
-              <a:rPr lang="en-US" sz="3600" b="1" dirty="0">
-                <a:solidFill>
-                  <a:srgbClr val="990011"/>
+              <a:rPr lang="en-US" sz="1800" i="1" dirty="0">
+                <a:solidFill>
+                  <a:srgbClr val="555555"/>
                 </a:solidFill>
                 <a:latin typeface="Times New Roman" pitchFamily="34" charset="0"/>
                 <a:ea typeface="Times New Roman" pitchFamily="34" charset="-122"/>
                 <a:cs typeface="Times New Roman" pitchFamily="34" charset="-120"/>
               </a:rPr>
-              <a:t>Activity 3: Answer</a:t>
-            </a:r>
-            <a:endParaRPr lang="en-US" sz="3600" dirty="0"/>
-          </a:p>
-        </p:txBody>
-      </p:sp>
-      <p:sp>
-        <p:nvSpPr>
-          <p:cNvPr id="5" name="Text 2"/>
-          <p:cNvSpPr/>
-          <p:nvPr/>
-        </p:nvSpPr>
-        <p:spPr>
-          <a:xfrm>
-            <a:off x="5349240" y="1783080"/>
-            <a:ext cx="6522415" cy="4663440"/>
-          </a:xfrm>
-          <a:prstGeom prst="rect">
-            <a:avLst/>
-          </a:prstGeom>
-          <a:noFill/>
-          <a:ln/>
-        </p:spPr>
-        <p:txBody>
-          <a:bodyPr wrap="square" lIns="0" tIns="0" rIns="0" bIns="0" rtlCol="0" anchor="t"/>
-          <a:lstStyle/>
-          <a:p>
-            <a:pPr algn="l" indent="0" marL="0">
-              <a:spcAft>
-                <a:spcPts val="800"/>
-              </a:spcAft>
-              <a:buNone/>
-            </a:pPr>
-            <a:r>
-              <a:rPr lang="en-US" sz="4000" dirty="0">
-                <a:solidFill>
-                  <a:srgbClr val="111111"/>
-                </a:solidFill>
-                <a:latin typeface="Times New Roman" pitchFamily="34" charset="0"/>
-                <a:ea typeface="Times New Roman" pitchFamily="34" charset="-122"/>
-                <a:cs typeface="Times New Roman" pitchFamily="34" charset="-120"/>
-              </a:rPr>
-              <a:t>The river carries a lot of mud (its load).</a:t>
-            </a:r>
-            <a:endParaRPr lang="en-US" sz="4000" dirty="0"/>
+              <a:t>A muddy river.</a:t>
+            </a:r>
+            <a:endParaRPr lang="en-US" sz="1800" dirty="0"/>
           </a:p>
         </p:txBody>
       </p:sp>
@@ -10475,7 +10653,7 @@
                 <a:ea typeface="Calibri" pitchFamily="34" charset="-122"/>
                 <a:cs typeface="Calibri" pitchFamily="34" charset="-120"/>
               </a:rPr>
-              <a:t>BOARD SUMMARY</a:t>
+              <a:t>2. MECHANISMS OF RIVER EROSION</a:t>
             </a:r>
             <a:endParaRPr lang="en-US" sz="1400" dirty="0"/>
           </a:p>
@@ -10540,7 +10718,7 @@
                 <a:ea typeface="Times New Roman" pitchFamily="34" charset="-122"/>
                 <a:cs typeface="Times New Roman" pitchFamily="34" charset="-120"/>
               </a:rPr>
-              <a:t>Board Summary</a:t>
+              <a:t>Activity 3: Question</a:t>
             </a:r>
             <a:endParaRPr lang="en-US" sz="3600" dirty="0"/>
           </a:p>
@@ -10574,7 +10752,7 @@
               <a:buNone/>
             </a:pPr>
             <a:r>
-              <a:rPr lang="en-US" sz="4000" b="1" dirty="0">
+              <a:rPr lang="en-US" sz="4000" dirty="0">
                 <a:solidFill>
                   <a:srgbClr val="111111"/>
                 </a:solidFill>
@@ -10582,47 +10760,7 @@
                 <a:ea typeface="Times New Roman" pitchFamily="34" charset="-122"/>
                 <a:cs typeface="Times New Roman" pitchFamily="34" charset="-120"/>
               </a:rPr>
-              <a:t>Topic: Denudation Processes, Landforms and Impacts on Man</a:t>
-            </a:r>
-            <a:endParaRPr lang="en-US" sz="4000" dirty="0"/>
-          </a:p>
-          <a:p>
-            <a:pPr algn="l" indent="0" marL="0">
-              <a:spcAft>
-                <a:spcPts val="800"/>
-              </a:spcAft>
-              <a:buNone/>
-            </a:pPr>
-            <a:r>
-              <a:rPr lang="en-US" sz="4000" b="1" dirty="0">
-                <a:solidFill>
-                  <a:srgbClr val="111111"/>
-                </a:solidFill>
-                <a:latin typeface="Times New Roman" pitchFamily="34" charset="0"/>
-                <a:ea typeface="Times New Roman" pitchFamily="34" charset="-122"/>
-                <a:cs typeface="Times New Roman" pitchFamily="34" charset="-120"/>
-              </a:rPr>
-              <a:t>Sub-topic: The Work of Rivers on the Landscape and Impacts on Man</a:t>
-            </a:r>
-            <a:endParaRPr lang="en-US" sz="4000" dirty="0"/>
-          </a:p>
-          <a:p>
-            <a:pPr algn="l" indent="0" marL="0">
-              <a:spcAft>
-                <a:spcPts val="800"/>
-              </a:spcAft>
-              <a:buNone/>
-            </a:pPr>
-            <a:r>
-              <a:rPr lang="en-US" sz="4000" b="1" dirty="0">
-                <a:solidFill>
-                  <a:srgbClr val="990011"/>
-                </a:solidFill>
-                <a:latin typeface="Times New Roman" pitchFamily="34" charset="0"/>
-                <a:ea typeface="Times New Roman" pitchFamily="34" charset="-122"/>
-                <a:cs typeface="Times New Roman" pitchFamily="34" charset="-120"/>
-              </a:rPr>
-              <a:t>Lesson 18: Action of Rivers on the Landscape</a:t>
+              <a:t>Where does the mud carried by this river come from?</a:t>
             </a:r>
             <a:endParaRPr lang="en-US" sz="4000" dirty="0"/>
           </a:p>
@@ -10734,7 +10872,7 @@
                 <a:ea typeface="Calibri" pitchFamily="34" charset="-122"/>
                 <a:cs typeface="Calibri" pitchFamily="34" charset="-120"/>
               </a:rPr>
-              <a:t>BOARD SUMMARY</a:t>
+              <a:t>2. MECHANISMS OF RIVER EROSION</a:t>
             </a:r>
             <a:endParaRPr lang="en-US" sz="1400" dirty="0"/>
           </a:p>
@@ -10799,7 +10937,7 @@
                 <a:ea typeface="Times New Roman" pitchFamily="34" charset="-122"/>
                 <a:cs typeface="Times New Roman" pitchFamily="34" charset="-120"/>
               </a:rPr>
-              <a:t>DEFINITIONS</a:t>
+              <a:t>Activity 3: Answer</a:t>
             </a:r>
             <a:endParaRPr lang="en-US" sz="3600" dirty="0"/>
           </a:p>
@@ -10833,7 +10971,7 @@
               <a:buNone/>
             </a:pPr>
             <a:r>
-              <a:rPr lang="en-US" sz="4000" i="1" dirty="0">
+              <a:rPr lang="en-US" sz="4000" dirty="0">
                 <a:solidFill>
                   <a:srgbClr val="111111"/>
                 </a:solidFill>
@@ -10841,81 +10979,7 @@
                 <a:ea typeface="Times New Roman" pitchFamily="34" charset="-122"/>
                 <a:cs typeface="Times New Roman" pitchFamily="34" charset="-120"/>
               </a:rPr>
-              <a:t>The key terms of this lesson are defined as follows:</a:t>
-            </a:r>
-            <a:endParaRPr lang="en-US" sz="4000" dirty="0"/>
-          </a:p>
-          <a:p>
-            <a:pPr algn="l" indent="0" marL="0">
-              <a:spcAft>
-                <a:spcPts val="800"/>
-              </a:spcAft>
-              <a:buNone/>
-            </a:pPr>
-            <a:r>
-              <a:rPr lang="en-US" sz="4000" b="1" dirty="0">
-                <a:solidFill>
-                  <a:srgbClr val="111111"/>
-                </a:solidFill>
-                <a:latin typeface="Times New Roman" pitchFamily="34" charset="0"/>
-                <a:ea typeface="Times New Roman" pitchFamily="34" charset="-122"/>
-                <a:cs typeface="Times New Roman" pitchFamily="34" charset="-120"/>
-              </a:rPr>
-              <a:t>Source: </a:t>
-            </a:r>
-            <a:pPr algn="l" indent="0" marL="0">
-              <a:spcAft>
-                <a:spcPts val="800"/>
-              </a:spcAft>
-              <a:buNone/>
-            </a:pPr>
-            <a:r>
-              <a:rPr lang="en-US" sz="4000" dirty="0">
-                <a:solidFill>
-                  <a:srgbClr val="111111"/>
-                </a:solidFill>
-                <a:latin typeface="Times New Roman" pitchFamily="34" charset="0"/>
-                <a:ea typeface="Times New Roman" pitchFamily="34" charset="-122"/>
-                <a:cs typeface="Times New Roman" pitchFamily="34" charset="-120"/>
-              </a:rPr>
-              <a:t>It is the place where a river begins.</a:t>
-            </a:r>
-            <a:endParaRPr lang="en-US" sz="4000" dirty="0"/>
-          </a:p>
-          <a:p>
-            <a:pPr algn="l" indent="0" marL="0">
-              <a:spcAft>
-                <a:spcPts val="800"/>
-              </a:spcAft>
-              <a:buNone/>
-            </a:pPr>
-            <a:r>
-              <a:rPr lang="en-US" sz="4000" b="1" dirty="0">
-                <a:solidFill>
-                  <a:srgbClr val="111111"/>
-                </a:solidFill>
-                <a:latin typeface="Times New Roman" pitchFamily="34" charset="0"/>
-                <a:ea typeface="Times New Roman" pitchFamily="34" charset="-122"/>
-                <a:cs typeface="Times New Roman" pitchFamily="34" charset="-120"/>
-              </a:rPr>
-              <a:t>Mouth: </a:t>
-            </a:r>
-            <a:pPr algn="l" indent="0" marL="0">
-              <a:spcAft>
-                <a:spcPts val="800"/>
-              </a:spcAft>
-              <a:buNone/>
-            </a:pPr>
-            <a:r>
-              <a:rPr lang="en-US" sz="4000" dirty="0">
-                <a:solidFill>
-                  <a:srgbClr val="111111"/>
-                </a:solidFill>
-                <a:latin typeface="Times New Roman" pitchFamily="34" charset="0"/>
-                <a:ea typeface="Times New Roman" pitchFamily="34" charset="-122"/>
-                <a:cs typeface="Times New Roman" pitchFamily="34" charset="-120"/>
-              </a:rPr>
-              <a:t>It is the place where a river ends in a sea, a lake or another river.</a:t>
+              <a:t>From the soil and rock worn away from its bed, its banks and its basin.</a:t>
             </a:r>
             <a:endParaRPr lang="en-US" sz="4000" dirty="0"/>
           </a:p>
@@ -12101,7 +12165,7 @@
                 <a:ea typeface="Times New Roman" pitchFamily="34" charset="-122"/>
                 <a:cs typeface="Times New Roman" pitchFamily="34" charset="-120"/>
               </a:rPr>
-              <a:t>DEFINITIONS (continued)</a:t>
+              <a:t>Board Summary</a:t>
             </a:r>
             <a:endParaRPr lang="en-US" sz="3600" dirty="0"/>
           </a:p>
@@ -12143,8 +12207,11 @@
                 <a:ea typeface="Times New Roman" pitchFamily="34" charset="-122"/>
                 <a:cs typeface="Times New Roman" pitchFamily="34" charset="-120"/>
               </a:rPr>
-              <a:t>Load: </a:t>
-            </a:r>
+              <a:t>Topic: Denudation Processes, Landforms and Impacts on Man</a:t>
+            </a:r>
+            <a:endParaRPr lang="en-US" sz="4000" dirty="0"/>
+          </a:p>
+          <a:p>
             <a:pPr algn="l" indent="0" marL="0">
               <a:spcAft>
                 <a:spcPts val="800"/>
@@ -12152,7 +12219,7 @@
               <a:buNone/>
             </a:pPr>
             <a:r>
-              <a:rPr lang="en-US" sz="4000" dirty="0">
+              <a:rPr lang="en-US" sz="4000" b="1" dirty="0">
                 <a:solidFill>
                   <a:srgbClr val="111111"/>
                 </a:solidFill>
@@ -12160,7 +12227,27 @@
                 <a:ea typeface="Times New Roman" pitchFamily="34" charset="-122"/>
                 <a:cs typeface="Times New Roman" pitchFamily="34" charset="-120"/>
               </a:rPr>
-              <a:t>It is the material carried by a river.</a:t>
+              <a:t>Sub-topic: The Work of Rivers on the Landscape and Impacts on Man</a:t>
+            </a:r>
+            <a:endParaRPr lang="en-US" sz="4000" dirty="0"/>
+          </a:p>
+          <a:p>
+            <a:pPr algn="l" indent="0" marL="0">
+              <a:spcAft>
+                <a:spcPts val="800"/>
+              </a:spcAft>
+              <a:buNone/>
+            </a:pPr>
+            <a:r>
+              <a:rPr lang="en-US" sz="4000" b="1" dirty="0">
+                <a:solidFill>
+                  <a:srgbClr val="990011"/>
+                </a:solidFill>
+                <a:latin typeface="Times New Roman" pitchFamily="34" charset="0"/>
+                <a:ea typeface="Times New Roman" pitchFamily="34" charset="-122"/>
+                <a:cs typeface="Times New Roman" pitchFamily="34" charset="-120"/>
+              </a:rPr>
+              <a:t>Lesson 18: Action of Rivers on the Landscape</a:t>
             </a:r>
             <a:endParaRPr lang="en-US" sz="4000" dirty="0"/>
           </a:p>
@@ -12337,7 +12424,7 @@
                 <a:ea typeface="Times New Roman" pitchFamily="34" charset="-122"/>
                 <a:cs typeface="Times New Roman" pitchFamily="34" charset="-120"/>
               </a:rPr>
-              <a:t>1. The Long Profile of a River</a:t>
+              <a:t>DEFINITIONS</a:t>
             </a:r>
             <a:endParaRPr lang="en-US" sz="3600" dirty="0"/>
           </a:p>
@@ -12379,7 +12466,7 @@
                 <a:ea typeface="Times New Roman" pitchFamily="34" charset="-122"/>
                 <a:cs typeface="Times New Roman" pitchFamily="34" charset="-120"/>
               </a:rPr>
-              <a:t>The long profile is explained as follows:</a:t>
+              <a:t>The key terms of this lesson are defined as follows:</a:t>
             </a:r>
             <a:endParaRPr lang="en-US" sz="4000" dirty="0"/>
           </a:p>
@@ -12399,7 +12486,7 @@
                 <a:ea typeface="Times New Roman" pitchFamily="34" charset="-122"/>
                 <a:cs typeface="Times New Roman" pitchFamily="34" charset="-120"/>
               </a:rPr>
-              <a:t>Long profile: </a:t>
+              <a:t>Long profile of a river: </a:t>
             </a:r>
             <a:pPr algn="l" indent="0" marL="0">
               <a:spcAft>
@@ -12416,7 +12503,7 @@
                 <a:ea typeface="Times New Roman" pitchFamily="34" charset="-122"/>
                 <a:cs typeface="Times New Roman" pitchFamily="34" charset="-120"/>
               </a:rPr>
-              <a:t>It is the slope of a river from its source to its mouth.</a:t>
+              <a:t>It is the slope of a river from its source to its mouth, seen from the side.</a:t>
             </a:r>
             <a:endParaRPr lang="en-US" sz="4000" dirty="0"/>
           </a:p>
@@ -12436,7 +12523,7 @@
                 <a:ea typeface="Times New Roman" pitchFamily="34" charset="-122"/>
                 <a:cs typeface="Times New Roman" pitchFamily="34" charset="-120"/>
               </a:rPr>
-              <a:t>Upper course: </a:t>
+              <a:t>Source: </a:t>
             </a:r>
             <a:pPr algn="l" indent="0" marL="0">
               <a:spcAft>
@@ -12453,7 +12540,7 @@
                 <a:ea typeface="Times New Roman" pitchFamily="34" charset="-122"/>
                 <a:cs typeface="Times New Roman" pitchFamily="34" charset="-120"/>
               </a:rPr>
-              <a:t>The slope is steep and the river cuts down.</a:t>
+              <a:t>It is the place where a river begins.</a:t>
             </a:r>
             <a:endParaRPr lang="en-US" sz="4000" dirty="0"/>
           </a:p>
@@ -12630,7 +12717,7 @@
                 <a:ea typeface="Times New Roman" pitchFamily="34" charset="-122"/>
                 <a:cs typeface="Times New Roman" pitchFamily="34" charset="-120"/>
               </a:rPr>
-              <a:t>1. The Long Profile of a River (continued)</a:t>
+              <a:t>DEFINITIONS (continued)</a:t>
             </a:r>
             <a:endParaRPr lang="en-US" sz="3600" dirty="0"/>
           </a:p>
@@ -12672,7 +12759,7 @@
                 <a:ea typeface="Times New Roman" pitchFamily="34" charset="-122"/>
                 <a:cs typeface="Times New Roman" pitchFamily="34" charset="-120"/>
               </a:rPr>
-              <a:t>Middle course: </a:t>
+              <a:t>Mouth: </a:t>
             </a:r>
             <a:pPr algn="l" indent="0" marL="0">
               <a:spcAft>
@@ -12689,7 +12776,7 @@
                 <a:ea typeface="Times New Roman" pitchFamily="34" charset="-122"/>
                 <a:cs typeface="Times New Roman" pitchFamily="34" charset="-120"/>
               </a:rPr>
-              <a:t>The slope is gentle and the river cuts sideways.</a:t>
+              <a:t>It is the place where a river ends in a sea, a lake or another river.</a:t>
             </a:r>
             <a:endParaRPr lang="en-US" sz="4000" dirty="0"/>
           </a:p>
@@ -12709,7 +12796,7 @@
                 <a:ea typeface="Times New Roman" pitchFamily="34" charset="-122"/>
                 <a:cs typeface="Times New Roman" pitchFamily="34" charset="-120"/>
               </a:rPr>
-              <a:t>Lower course: </a:t>
+              <a:t>Load: </a:t>
             </a:r>
             <a:pPr algn="l" indent="0" marL="0">
               <a:spcAft>
@@ -12726,7 +12813,7 @@
                 <a:ea typeface="Times New Roman" pitchFamily="34" charset="-122"/>
                 <a:cs typeface="Times New Roman" pitchFamily="34" charset="-120"/>
               </a:rPr>
-              <a:t>The land is almost flat and the river drops its load.</a:t>
+              <a:t>It is the material carried by a river.</a:t>
             </a:r>
             <a:endParaRPr lang="en-US" sz="4000" dirty="0"/>
           </a:p>
@@ -12852,8 +12939,8 @@
         </p:nvSpPr>
         <p:spPr>
           <a:xfrm>
-            <a:off x="457200" y="1005840"/>
-            <a:ext cx="11277295" cy="731520"/>
+            <a:off x="365760" y="1005840"/>
+            <a:ext cx="11460175" cy="731520"/>
           </a:xfrm>
           <a:prstGeom prst="rect">
             <a:avLst/>
@@ -12862,7 +12949,9 @@
           <a:ln/>
         </p:spPr>
         <p:txBody>
-          <a:bodyPr wrap="square" lIns="0" tIns="0" rIns="0" bIns="0" rtlCol="0" anchor="ctr"/>
+          <a:bodyPr wrap="square" lIns="0" tIns="0" rIns="0" bIns="0" rtlCol="0" anchor="ctr">
+            <a:normAutofit/>
+          </a:bodyPr>
           <a:lstStyle/>
           <a:p>
             <a:pPr algn="ctr" indent="0" marL="0">
@@ -12877,7 +12966,86 @@
                 <a:ea typeface="Times New Roman" pitchFamily="34" charset="-122"/>
                 <a:cs typeface="Times New Roman" pitchFamily="34" charset="-120"/>
               </a:rPr>
-              <a:t>1. The Long Profile of a River</a:t>
+              <a:t>1. Illustration of the Long Profile</a:t>
+            </a:r>
+            <a:endParaRPr lang="en-US" sz="3600" dirty="0"/>
+          </a:p>
+        </p:txBody>
+      </p:sp>
+      <p:sp>
+        <p:nvSpPr>
+          <p:cNvPr id="4" name="Text 2"/>
+          <p:cNvSpPr/>
+          <p:nvPr/>
+        </p:nvSpPr>
+        <p:spPr>
+          <a:xfrm>
+            <a:off x="365760" y="1783080"/>
+            <a:ext cx="4846320" cy="4617720"/>
+          </a:xfrm>
+          <a:prstGeom prst="rect">
+            <a:avLst/>
+          </a:prstGeom>
+          <a:noFill/>
+          <a:ln/>
+        </p:spPr>
+        <p:txBody>
+          <a:bodyPr wrap="square" lIns="0" tIns="0" rIns="0" bIns="0" rtlCol="0" anchor="t"/>
+          <a:lstStyle/>
+          <a:p>
+            <a:pPr algn="l" indent="0" marL="0">
+              <a:spcAft>
+                <a:spcPts val="800"/>
+              </a:spcAft>
+              <a:buNone/>
+            </a:pPr>
+            <a:r>
+              <a:rPr lang="en-US" sz="3600" i="1" dirty="0">
+                <a:solidFill>
+                  <a:srgbClr val="111111"/>
+                </a:solidFill>
+                <a:latin typeface="Times New Roman" pitchFamily="34" charset="0"/>
+                <a:ea typeface="Times New Roman" pitchFamily="34" charset="-122"/>
+                <a:cs typeface="Times New Roman" pitchFamily="34" charset="-120"/>
+              </a:rPr>
+              <a:t>The long profile of a river has three courses:</a:t>
+            </a:r>
+            <a:endParaRPr lang="en-US" sz="3600" dirty="0"/>
+          </a:p>
+          <a:p>
+            <a:pPr algn="l" indent="0" marL="0">
+              <a:spcAft>
+                <a:spcPts val="800"/>
+              </a:spcAft>
+              <a:buNone/>
+            </a:pPr>
+            <a:r>
+              <a:rPr lang="en-US" sz="3600" b="1" dirty="0">
+                <a:solidFill>
+                  <a:srgbClr val="111111"/>
+                </a:solidFill>
+                <a:latin typeface="Times New Roman" pitchFamily="34" charset="0"/>
+                <a:ea typeface="Times New Roman" pitchFamily="34" charset="-122"/>
+                <a:cs typeface="Times New Roman" pitchFamily="34" charset="-120"/>
+              </a:rPr>
+              <a:t>The upper course: </a:t>
+            </a:r>
+            <a:pPr algn="l" indent="0" marL="0">
+              <a:spcAft>
+                <a:spcPts val="800"/>
+              </a:spcAft>
+              <a:buNone/>
+            </a:pPr>
+            <a:r>
+              <a:rPr lang="en-US" sz="3600" dirty="0">
+                <a:solidFill>
+                  <a:srgbClr val="111111"/>
+                </a:solidFill>
+                <a:latin typeface="Times New Roman" pitchFamily="34" charset="0"/>
+                <a:ea typeface="Times New Roman" pitchFamily="34" charset="-122"/>
+                <a:cs typeface="Times New Roman" pitchFamily="34" charset="-120"/>
+              </a:rPr>
+              <a:t>The slope is steep, the water is fast, and the river cuts down.</a:t>
             </a:r>
             <a:endParaRPr lang="en-US" sz="3600" dirty="0"/>
           </a:p>
@@ -12885,7 +13053,7 @@
       </p:sp>
       <p:pic>
         <p:nvPicPr>
-          <p:cNvPr id="4" name="Image 0" descr="/home/claude/f4/img/v2/long_profile_big.png">    </p:cNvPr>
+          <p:cNvPr id="5" name="Image 0" descr="/home/claude/f4/img/v2/long_profile_big.png">    </p:cNvPr>
           <p:cNvPicPr>
             <a:picLocks noChangeAspect="1"/>
           </p:cNvPicPr>
@@ -12899,8 +13067,8 @@
         </p:blipFill>
         <p:spPr>
           <a:xfrm>
-            <a:off x="629930" y="1783080"/>
-            <a:ext cx="10931835" cy="4270248"/>
+            <a:off x="5349240" y="2617506"/>
+            <a:ext cx="6659575" cy="2601397"/>
           </a:xfrm>
           <a:prstGeom prst="rect">
             <a:avLst/>
@@ -12909,14 +13077,14 @@
       </p:pic>
       <p:sp>
         <p:nvSpPr>
-          <p:cNvPr id="5" name="Text 2"/>
+          <p:cNvPr id="6" name="Text 3"/>
           <p:cNvSpPr/>
           <p:nvPr/>
         </p:nvSpPr>
         <p:spPr>
           <a:xfrm>
-            <a:off x="457200" y="6089904"/>
-            <a:ext cx="11277295" cy="347472"/>
+            <a:off x="5349240" y="6089904"/>
+            <a:ext cx="6659575" cy="347472"/>
           </a:xfrm>
           <a:prstGeom prst="rect">
             <a:avLst/>
@@ -12932,7 +13100,7 @@
               <a:buNone/>
             </a:pPr>
             <a:r>
-              <a:rPr lang="en-US" sz="1800" i="1" dirty="0">
+              <a:rPr lang="en-US" sz="1600" i="1" dirty="0">
                 <a:solidFill>
                   <a:srgbClr val="555555"/>
                 </a:solidFill>
@@ -12942,7 +13110,7 @@
               </a:rPr>
               <a:t>Illustration: the long profile of a river</a:t>
             </a:r>
-            <a:endParaRPr lang="en-US" sz="1800" dirty="0"/>
+            <a:endParaRPr lang="en-US" sz="1600" dirty="0"/>
           </a:p>
         </p:txBody>
       </p:sp>
@@ -13075,7 +13243,7 @@
         <p:spPr>
           <a:xfrm>
             <a:off x="0" y="658368"/>
-            <a:ext cx="2468880" cy="5833872"/>
+            <a:ext cx="3840480" cy="5833872"/>
           </a:xfrm>
           <a:prstGeom prst="rect">
             <a:avLst/>
@@ -13090,8 +13258,8 @@
         </p:nvSpPr>
         <p:spPr>
           <a:xfrm>
-            <a:off x="2697480" y="1005840"/>
-            <a:ext cx="9174175" cy="731520"/>
+            <a:off x="4069080" y="1005840"/>
+            <a:ext cx="7802575" cy="731520"/>
           </a:xfrm>
           <a:prstGeom prst="rect">
             <a:avLst/>
@@ -13117,7 +13285,7 @@
                 <a:ea typeface="Times New Roman" pitchFamily="34" charset="-122"/>
                 <a:cs typeface="Times New Roman" pitchFamily="34" charset="-120"/>
               </a:rPr>
-              <a:t>2. Mechanisms of River Erosion</a:t>
+              <a:t>1. Illustration of the Long Profile</a:t>
             </a:r>
             <a:endParaRPr lang="en-US" sz="3600" dirty="0"/>
           </a:p>
@@ -13131,8 +13299,8 @@
         </p:nvSpPr>
         <p:spPr>
           <a:xfrm>
-            <a:off x="2697480" y="1783080"/>
-            <a:ext cx="9174175" cy="4663440"/>
+            <a:off x="4069080" y="1783080"/>
+            <a:ext cx="7802575" cy="4663440"/>
           </a:xfrm>
           <a:prstGeom prst="rect">
             <a:avLst/>
@@ -13151,7 +13319,7 @@
               <a:buNone/>
             </a:pPr>
             <a:r>
-              <a:rPr lang="en-US" sz="4000" i="1" dirty="0">
+              <a:rPr lang="en-US" sz="4000" b="1" dirty="0">
                 <a:solidFill>
                   <a:srgbClr val="111111"/>
                 </a:solidFill>
@@ -13159,11 +13327,8 @@
                 <a:ea typeface="Times New Roman" pitchFamily="34" charset="-122"/>
                 <a:cs typeface="Times New Roman" pitchFamily="34" charset="-120"/>
               </a:rPr>
-              <a:t>Rivers erode through the following processes:</a:t>
-            </a:r>
-            <a:endParaRPr lang="en-US" sz="4000" dirty="0"/>
-          </a:p>
-          <a:p>
+              <a:t>The middle course: </a:t>
+            </a:r>
             <a:pPr algn="l" indent="0" marL="0">
               <a:spcAft>
                 <a:spcPts val="800"/>
@@ -13171,7 +13336,7 @@
               <a:buNone/>
             </a:pPr>
             <a:r>
-              <a:rPr lang="en-US" sz="4000" b="1" dirty="0">
+              <a:rPr lang="en-US" sz="4000" dirty="0">
                 <a:solidFill>
                   <a:srgbClr val="111111"/>
                 </a:solidFill>
@@ -13179,8 +13344,11 @@
                 <a:ea typeface="Times New Roman" pitchFamily="34" charset="-122"/>
                 <a:cs typeface="Times New Roman" pitchFamily="34" charset="-120"/>
               </a:rPr>
-              <a:t>Hydraulic action: </a:t>
-            </a:r>
+              <a:t>The slope is gentle, the valley widens, and the river cuts sideways.</a:t>
+            </a:r>
+            <a:endParaRPr lang="en-US" sz="4000" dirty="0"/>
+          </a:p>
+          <a:p>
             <a:pPr algn="l" indent="0" marL="0">
               <a:spcAft>
                 <a:spcPts val="800"/>
@@ -13188,7 +13356,7 @@
               <a:buNone/>
             </a:pPr>
             <a:r>
-              <a:rPr lang="en-US" sz="4000" dirty="0">
+              <a:rPr lang="en-US" sz="4000" b="1" dirty="0">
                 <a:solidFill>
                   <a:srgbClr val="111111"/>
                 </a:solidFill>
@@ -13196,11 +13364,8 @@
                 <a:ea typeface="Times New Roman" pitchFamily="34" charset="-122"/>
                 <a:cs typeface="Times New Roman" pitchFamily="34" charset="-120"/>
               </a:rPr>
-              <a:t>The force of the moving water breaks and removes rock.</a:t>
-            </a:r>
-            <a:endParaRPr lang="en-US" sz="4000" dirty="0"/>
-          </a:p>
-          <a:p>
+              <a:t>The lower course: </a:t>
+            </a:r>
             <a:pPr algn="l" indent="0" marL="0">
               <a:spcAft>
                 <a:spcPts val="800"/>
@@ -13208,7 +13373,7 @@
               <a:buNone/>
             </a:pPr>
             <a:r>
-              <a:rPr lang="en-US" sz="4000" b="1" dirty="0">
+              <a:rPr lang="en-US" sz="4000" dirty="0">
                 <a:solidFill>
                   <a:srgbClr val="111111"/>
                 </a:solidFill>
@@ -13216,24 +13381,7 @@
                 <a:ea typeface="Times New Roman" pitchFamily="34" charset="-122"/>
                 <a:cs typeface="Times New Roman" pitchFamily="34" charset="-120"/>
               </a:rPr>
-              <a:t>Abrasion: </a:t>
-            </a:r>
-            <a:pPr algn="l" indent="0" marL="0">
-              <a:spcAft>
-                <a:spcPts val="800"/>
-              </a:spcAft>
-              <a:buNone/>
-            </a:pPr>
-            <a:r>
-              <a:rPr lang="en-US" sz="4000" dirty="0">
-                <a:solidFill>
-                  <a:srgbClr val="111111"/>
-                </a:solidFill>
-                <a:latin typeface="Times New Roman" pitchFamily="34" charset="0"/>
-                <a:ea typeface="Times New Roman" pitchFamily="34" charset="-122"/>
-                <a:cs typeface="Times New Roman" pitchFamily="34" charset="-120"/>
-              </a:rPr>
-              <a:t>Stones carried by the river scrape the bed and the banks.</a:t>
+              <a:t>The land is almost flat, the water is slow, and the river drops its load.</a:t>
             </a:r>
             <a:endParaRPr lang="en-US" sz="4000" dirty="0"/>
           </a:p>
@@ -13410,7 +13558,7 @@
                 <a:ea typeface="Times New Roman" pitchFamily="34" charset="-122"/>
                 <a:cs typeface="Times New Roman" pitchFamily="34" charset="-120"/>
               </a:rPr>
-              <a:t>2. Mechanisms of River Erosion (continued)</a:t>
+              <a:t>1. Illustration of the Long Profile (continued)</a:t>
             </a:r>
             <a:endParaRPr lang="en-US" sz="3600" dirty="0"/>
           </a:p>
@@ -13452,7 +13600,7 @@
                 <a:ea typeface="Times New Roman" pitchFamily="34" charset="-122"/>
                 <a:cs typeface="Times New Roman" pitchFamily="34" charset="-120"/>
               </a:rPr>
-              <a:t>Attrition: </a:t>
+              <a:t>Shape: </a:t>
             </a:r>
             <a:pPr algn="l" indent="0" marL="0">
               <a:spcAft>
@@ -13469,44 +13617,7 @@
                 <a:ea typeface="Times New Roman" pitchFamily="34" charset="-122"/>
                 <a:cs typeface="Times New Roman" pitchFamily="34" charset="-120"/>
               </a:rPr>
-              <a:t>Stones hit each other and become smaller and rounder.</a:t>
-            </a:r>
-            <a:endParaRPr lang="en-US" sz="4000" dirty="0"/>
-          </a:p>
-          <a:p>
-            <a:pPr algn="l" indent="0" marL="0">
-              <a:spcAft>
-                <a:spcPts val="800"/>
-              </a:spcAft>
-              <a:buNone/>
-            </a:pPr>
-            <a:r>
-              <a:rPr lang="en-US" sz="4000" b="1" dirty="0">
-                <a:solidFill>
-                  <a:srgbClr val="111111"/>
-                </a:solidFill>
-                <a:latin typeface="Times New Roman" pitchFamily="34" charset="0"/>
-                <a:ea typeface="Times New Roman" pitchFamily="34" charset="-122"/>
-                <a:cs typeface="Times New Roman" pitchFamily="34" charset="-120"/>
-              </a:rPr>
-              <a:t>Solution: </a:t>
-            </a:r>
-            <a:pPr algn="l" indent="0" marL="0">
-              <a:spcAft>
-                <a:spcPts val="800"/>
-              </a:spcAft>
-              <a:buNone/>
-            </a:pPr>
-            <a:r>
-              <a:rPr lang="en-US" sz="4000" dirty="0">
-                <a:solidFill>
-                  <a:srgbClr val="111111"/>
-                </a:solidFill>
-                <a:latin typeface="Times New Roman" pitchFamily="34" charset="0"/>
-                <a:ea typeface="Times New Roman" pitchFamily="34" charset="-122"/>
-                <a:cs typeface="Times New Roman" pitchFamily="34" charset="-120"/>
-              </a:rPr>
-              <a:t>The water dissolves some rocks, such as limestone.</a:t>
+              <a:t>The long profile is a concave curve, steep at the source and gentle towards the mouth.</a:t>
             </a:r>
             <a:endParaRPr lang="en-US" sz="4000" dirty="0"/>
           </a:p>
@@ -13618,15 +13729,135 @@
                 <a:ea typeface="Calibri" pitchFamily="34" charset="-122"/>
                 <a:cs typeface="Calibri" pitchFamily="34" charset="-120"/>
               </a:rPr>
-              <a:t>FORMATIVE EVALUATION</a:t>
+              <a:t>BOARD SUMMARY</a:t>
             </a:r>
             <a:endParaRPr lang="en-US" sz="1400" dirty="0"/>
+          </a:p>
+        </p:txBody>
+      </p:sp>
+      <p:sp>
+        <p:nvSpPr>
+          <p:cNvPr id="3" name="Text 1"/>
+          <p:cNvSpPr/>
+          <p:nvPr/>
+        </p:nvSpPr>
+        <p:spPr>
+          <a:xfrm>
+            <a:off x="365760" y="1005840"/>
+            <a:ext cx="11460175" cy="731520"/>
+          </a:xfrm>
+          <a:prstGeom prst="rect">
+            <a:avLst/>
+          </a:prstGeom>
+          <a:noFill/>
+          <a:ln/>
+        </p:spPr>
+        <p:txBody>
+          <a:bodyPr wrap="square" lIns="0" tIns="0" rIns="0" bIns="0" rtlCol="0" anchor="ctr">
+            <a:normAutofit/>
+          </a:bodyPr>
+          <a:lstStyle/>
+          <a:p>
+            <a:pPr algn="ctr" indent="0" marL="0">
+              <a:buNone/>
+            </a:pPr>
+            <a:r>
+              <a:rPr lang="en-US" sz="3600" b="1" dirty="0">
+                <a:solidFill>
+                  <a:srgbClr val="990011"/>
+                </a:solidFill>
+                <a:latin typeface="Times New Roman" pitchFamily="34" charset="0"/>
+                <a:ea typeface="Times New Roman" pitchFamily="34" charset="-122"/>
+                <a:cs typeface="Times New Roman" pitchFamily="34" charset="-120"/>
+              </a:rPr>
+              <a:t>2. Mechanisms of River Erosion</a:t>
+            </a:r>
+            <a:endParaRPr lang="en-US" sz="3600" dirty="0"/>
+          </a:p>
+        </p:txBody>
+      </p:sp>
+      <p:sp>
+        <p:nvSpPr>
+          <p:cNvPr id="4" name="Text 2"/>
+          <p:cNvSpPr/>
+          <p:nvPr/>
+        </p:nvSpPr>
+        <p:spPr>
+          <a:xfrm>
+            <a:off x="365760" y="1783080"/>
+            <a:ext cx="4846320" cy="4617720"/>
+          </a:xfrm>
+          <a:prstGeom prst="rect">
+            <a:avLst/>
+          </a:prstGeom>
+          <a:noFill/>
+          <a:ln/>
+        </p:spPr>
+        <p:txBody>
+          <a:bodyPr wrap="square" lIns="0" tIns="0" rIns="0" bIns="0" rtlCol="0" anchor="t"/>
+          <a:lstStyle/>
+          <a:p>
+            <a:pPr algn="l" indent="0" marL="0">
+              <a:spcAft>
+                <a:spcPts val="800"/>
+              </a:spcAft>
+              <a:buNone/>
+            </a:pPr>
+            <a:r>
+              <a:rPr lang="en-US" sz="3600" i="1" dirty="0">
+                <a:solidFill>
+                  <a:srgbClr val="111111"/>
+                </a:solidFill>
+                <a:latin typeface="Times New Roman" pitchFamily="34" charset="0"/>
+                <a:ea typeface="Times New Roman" pitchFamily="34" charset="-122"/>
+                <a:cs typeface="Times New Roman" pitchFamily="34" charset="-120"/>
+              </a:rPr>
+              <a:t>Rivers erode their bed and banks by the following mechanisms:</a:t>
+            </a:r>
+            <a:endParaRPr lang="en-US" sz="3600" dirty="0"/>
+          </a:p>
+          <a:p>
+            <a:pPr algn="l" indent="0" marL="0">
+              <a:spcAft>
+                <a:spcPts val="800"/>
+              </a:spcAft>
+              <a:buNone/>
+            </a:pPr>
+            <a:r>
+              <a:rPr lang="en-US" sz="3600" b="1" dirty="0">
+                <a:solidFill>
+                  <a:srgbClr val="111111"/>
+                </a:solidFill>
+                <a:latin typeface="Times New Roman" pitchFamily="34" charset="0"/>
+                <a:ea typeface="Times New Roman" pitchFamily="34" charset="-122"/>
+                <a:cs typeface="Times New Roman" pitchFamily="34" charset="-120"/>
+              </a:rPr>
+              <a:t>Hydraulic action: </a:t>
+            </a:r>
+            <a:pPr algn="l" indent="0" marL="0">
+              <a:spcAft>
+                <a:spcPts val="800"/>
+              </a:spcAft>
+              <a:buNone/>
+            </a:pPr>
+            <a:r>
+              <a:rPr lang="en-US" sz="3600" dirty="0">
+                <a:solidFill>
+                  <a:srgbClr val="111111"/>
+                </a:solidFill>
+                <a:latin typeface="Times New Roman" pitchFamily="34" charset="0"/>
+                <a:ea typeface="Times New Roman" pitchFamily="34" charset="-122"/>
+                <a:cs typeface="Times New Roman" pitchFamily="34" charset="-120"/>
+              </a:rPr>
+              <a:t>The force of the moving water breaks and removes rock and soil from the bed and banks.</a:t>
+            </a:r>
+            <a:endParaRPr lang="en-US" sz="3600" dirty="0"/>
           </a:p>
         </p:txBody>
       </p:sp>
       <p:pic>
         <p:nvPicPr>
-          <p:cNvPr id="3" name="Image 0" descr="/home/claude/f4/img/minesec_sheet.png">    </p:cNvPr>
+          <p:cNvPr id="5" name="Image 0" descr="/home/claude/f4/img/v2/river_erosion_big.png">    </p:cNvPr>
           <p:cNvPicPr>
             <a:picLocks noChangeAspect="1"/>
           </p:cNvPicPr>
@@ -13640,8 +13871,8 @@
         </p:blipFill>
         <p:spPr>
           <a:xfrm>
-            <a:off x="0" y="658368"/>
-            <a:ext cx="5120640" cy="5833872"/>
+            <a:off x="5349240" y="2617506"/>
+            <a:ext cx="6659575" cy="2601397"/>
           </a:xfrm>
           <a:prstGeom prst="rect">
             <a:avLst/>
@@ -13650,14 +13881,14 @@
       </p:pic>
       <p:sp>
         <p:nvSpPr>
-          <p:cNvPr id="4" name="Text 1"/>
+          <p:cNvPr id="6" name="Text 3"/>
           <p:cNvSpPr/>
           <p:nvPr/>
         </p:nvSpPr>
         <p:spPr>
           <a:xfrm>
-            <a:off x="5349240" y="1005840"/>
-            <a:ext cx="6522415" cy="731520"/>
+            <a:off x="5349240" y="6089904"/>
+            <a:ext cx="6659575" cy="347472"/>
           </a:xfrm>
           <a:prstGeom prst="rect">
             <a:avLst/>
@@ -13666,68 +13897,24 @@
           <a:ln/>
         </p:spPr>
         <p:txBody>
-          <a:bodyPr wrap="square" lIns="0" tIns="0" rIns="0" bIns="0" rtlCol="0" anchor="ctr">
-            <a:normAutofit/>
-          </a:bodyPr>
+          <a:bodyPr wrap="square" lIns="0" tIns="0" rIns="0" bIns="0" rtlCol="0" anchor="ctr"/>
           <a:lstStyle/>
           <a:p>
             <a:pPr algn="ctr" indent="0" marL="0">
               <a:buNone/>
             </a:pPr>
             <a:r>
-              <a:rPr lang="en-US" sz="3600" b="1" dirty="0">
-                <a:solidFill>
-                  <a:srgbClr val="990011"/>
+              <a:rPr lang="en-US" sz="1600" i="1" dirty="0">
+                <a:solidFill>
+                  <a:srgbClr val="555555"/>
                 </a:solidFill>
                 <a:latin typeface="Times New Roman" pitchFamily="34" charset="0"/>
                 <a:ea typeface="Times New Roman" pitchFamily="34" charset="-122"/>
                 <a:cs typeface="Times New Roman" pitchFamily="34" charset="-120"/>
               </a:rPr>
-              <a:t>Evaluation 1</a:t>
-            </a:r>
-            <a:endParaRPr lang="en-US" sz="3600" dirty="0"/>
-          </a:p>
-        </p:txBody>
-      </p:sp>
-      <p:sp>
-        <p:nvSpPr>
-          <p:cNvPr id="5" name="Text 2"/>
-          <p:cNvSpPr/>
-          <p:nvPr/>
-        </p:nvSpPr>
-        <p:spPr>
-          <a:xfrm>
-            <a:off x="5349240" y="1783080"/>
-            <a:ext cx="6522415" cy="4663440"/>
-          </a:xfrm>
-          <a:prstGeom prst="rect">
-            <a:avLst/>
-          </a:prstGeom>
-          <a:noFill/>
-          <a:ln/>
-        </p:spPr>
-        <p:txBody>
-          <a:bodyPr wrap="square" lIns="0" tIns="0" rIns="0" bIns="0" rtlCol="0" anchor="t"/>
-          <a:lstStyle/>
-          <a:p>
-            <a:pPr algn="l" indent="0" marL="0">
-              <a:spcAft>
-                <a:spcPts val="800"/>
-              </a:spcAft>
-              <a:buNone/>
-            </a:pPr>
-            <a:r>
-              <a:rPr lang="en-US" sz="4000" dirty="0">
-                <a:solidFill>
-                  <a:srgbClr val="111111"/>
-                </a:solidFill>
-                <a:latin typeface="Times New Roman" pitchFamily="34" charset="0"/>
-                <a:ea typeface="Times New Roman" pitchFamily="34" charset="-122"/>
-                <a:cs typeface="Times New Roman" pitchFamily="34" charset="-120"/>
-              </a:rPr>
-              <a:t>Name the three courses of a river.</a:t>
-            </a:r>
-            <a:endParaRPr lang="en-US" sz="4000" dirty="0"/>
+              <a:t>Illustration: mechanisms of river erosion</a:t>
+            </a:r>
+            <a:endParaRPr lang="en-US" sz="1600" dirty="0"/>
           </a:p>
         </p:txBody>
       </p:sp>
@@ -13837,7 +14024,7 @@
                 <a:ea typeface="Calibri" pitchFamily="34" charset="-122"/>
                 <a:cs typeface="Calibri" pitchFamily="34" charset="-120"/>
               </a:rPr>
-              <a:t>FORMATIVE EVALUATION</a:t>
+              <a:t>BOARD SUMMARY</a:t>
             </a:r>
             <a:endParaRPr lang="en-US" sz="1400" dirty="0"/>
           </a:p>
@@ -13860,7 +14047,7 @@
         <p:spPr>
           <a:xfrm>
             <a:off x="0" y="658368"/>
-            <a:ext cx="5120640" cy="5833872"/>
+            <a:ext cx="1463040" cy="5833872"/>
           </a:xfrm>
           <a:prstGeom prst="rect">
             <a:avLst/>
@@ -13875,8 +14062,8 @@
         </p:nvSpPr>
         <p:spPr>
           <a:xfrm>
-            <a:off x="5349240" y="1005840"/>
-            <a:ext cx="6522415" cy="731520"/>
+            <a:off x="1691640" y="1005840"/>
+            <a:ext cx="10180015" cy="731520"/>
           </a:xfrm>
           <a:prstGeom prst="rect">
             <a:avLst/>
@@ -13902,7 +14089,7 @@
                 <a:ea typeface="Times New Roman" pitchFamily="34" charset="-122"/>
                 <a:cs typeface="Times New Roman" pitchFamily="34" charset="-120"/>
               </a:rPr>
-              <a:t>Expected Answer</a:t>
+              <a:t>2. Mechanisms of River Erosion</a:t>
             </a:r>
             <a:endParaRPr lang="en-US" sz="3600" dirty="0"/>
           </a:p>
@@ -13916,8 +14103,8 @@
         </p:nvSpPr>
         <p:spPr>
           <a:xfrm>
-            <a:off x="5349240" y="1783080"/>
-            <a:ext cx="6522415" cy="4663440"/>
+            <a:off x="1691640" y="1783080"/>
+            <a:ext cx="10180015" cy="4663440"/>
           </a:xfrm>
           <a:prstGeom prst="rect">
             <a:avLst/>
@@ -13936,7 +14123,7 @@
               <a:buNone/>
             </a:pPr>
             <a:r>
-              <a:rPr lang="en-US" sz="4000" dirty="0">
+              <a:rPr lang="en-US" sz="4000" b="1" dirty="0">
                 <a:solidFill>
                   <a:srgbClr val="111111"/>
                 </a:solidFill>
@@ -13944,7 +14131,98 @@
                 <a:ea typeface="Times New Roman" pitchFamily="34" charset="-122"/>
                 <a:cs typeface="Times New Roman" pitchFamily="34" charset="-120"/>
               </a:rPr>
-              <a:t>Upper, middle and lower course.</a:t>
+              <a:t>Abrasion (corrasion): </a:t>
+            </a:r>
+            <a:pPr algn="l" indent="0" marL="0">
+              <a:spcAft>
+                <a:spcPts val="800"/>
+              </a:spcAft>
+              <a:buNone/>
+            </a:pPr>
+            <a:r>
+              <a:rPr lang="en-US" sz="4000" dirty="0">
+                <a:solidFill>
+                  <a:srgbClr val="111111"/>
+                </a:solidFill>
+                <a:latin typeface="Times New Roman" pitchFamily="34" charset="0"/>
+                <a:ea typeface="Times New Roman" pitchFamily="34" charset="-122"/>
+                <a:cs typeface="Times New Roman" pitchFamily="34" charset="-120"/>
+              </a:rPr>
+              <a:t>Stones carried by the river scrape and wear the bed and the banks.</a:t>
+            </a:r>
+            <a:endParaRPr lang="en-US" sz="4000" dirty="0"/>
+          </a:p>
+          <a:p>
+            <a:pPr algn="l" indent="0" marL="0">
+              <a:spcAft>
+                <a:spcPts val="800"/>
+              </a:spcAft>
+              <a:buNone/>
+            </a:pPr>
+            <a:r>
+              <a:rPr lang="en-US" sz="4000" b="1" dirty="0">
+                <a:solidFill>
+                  <a:srgbClr val="111111"/>
+                </a:solidFill>
+                <a:latin typeface="Times New Roman" pitchFamily="34" charset="0"/>
+                <a:ea typeface="Times New Roman" pitchFamily="34" charset="-122"/>
+                <a:cs typeface="Times New Roman" pitchFamily="34" charset="-120"/>
+              </a:rPr>
+              <a:t>Attrition: </a:t>
+            </a:r>
+            <a:pPr algn="l" indent="0" marL="0">
+              <a:spcAft>
+                <a:spcPts val="800"/>
+              </a:spcAft>
+              <a:buNone/>
+            </a:pPr>
+            <a:r>
+              <a:rPr lang="en-US" sz="4000" dirty="0">
+                <a:solidFill>
+                  <a:srgbClr val="111111"/>
+                </a:solidFill>
+                <a:latin typeface="Times New Roman" pitchFamily="34" charset="0"/>
+                <a:ea typeface="Times New Roman" pitchFamily="34" charset="-122"/>
+                <a:cs typeface="Times New Roman" pitchFamily="34" charset="-120"/>
+              </a:rPr>
+              <a:t>Stones carried by the river hit one another and become smaller and rounder.</a:t>
+            </a:r>
+            <a:endParaRPr lang="en-US" sz="4000" dirty="0"/>
+          </a:p>
+          <a:p>
+            <a:pPr algn="l" indent="0" marL="0">
+              <a:spcAft>
+                <a:spcPts val="800"/>
+              </a:spcAft>
+              <a:buNone/>
+            </a:pPr>
+            <a:r>
+              <a:rPr lang="en-US" sz="4000" b="1" dirty="0">
+                <a:solidFill>
+                  <a:srgbClr val="111111"/>
+                </a:solidFill>
+                <a:latin typeface="Times New Roman" pitchFamily="34" charset="0"/>
+                <a:ea typeface="Times New Roman" pitchFamily="34" charset="-122"/>
+                <a:cs typeface="Times New Roman" pitchFamily="34" charset="-120"/>
+              </a:rPr>
+              <a:t>Solution (corrosion): </a:t>
+            </a:r>
+            <a:pPr algn="l" indent="0" marL="0">
+              <a:spcAft>
+                <a:spcPts val="800"/>
+              </a:spcAft>
+              <a:buNone/>
+            </a:pPr>
+            <a:r>
+              <a:rPr lang="en-US" sz="4000" dirty="0">
+                <a:solidFill>
+                  <a:srgbClr val="111111"/>
+                </a:solidFill>
+                <a:latin typeface="Times New Roman" pitchFamily="34" charset="0"/>
+                <a:ea typeface="Times New Roman" pitchFamily="34" charset="-122"/>
+                <a:cs typeface="Times New Roman" pitchFamily="34" charset="-120"/>
+              </a:rPr>
+              <a:t>The river water dissolves some rocks, such as limestone.</a:t>
             </a:r>
             <a:endParaRPr lang="en-US" sz="4000" dirty="0"/>
           </a:p>
@@ -14121,7 +14399,7 @@
                 <a:ea typeface="Times New Roman" pitchFamily="34" charset="-122"/>
                 <a:cs typeface="Times New Roman" pitchFamily="34" charset="-120"/>
               </a:rPr>
-              <a:t>Evaluation 2</a:t>
+              <a:t>Evaluation 1</a:t>
             </a:r>
             <a:endParaRPr lang="en-US" sz="3600" dirty="0"/>
           </a:p>
@@ -14163,7 +14441,7 @@
                 <a:ea typeface="Times New Roman" pitchFamily="34" charset="-122"/>
                 <a:cs typeface="Times New Roman" pitchFamily="34" charset="-120"/>
               </a:rPr>
-              <a:t>What is attrition?</a:t>
+              <a:t>Name the three courses of a river.</a:t>
             </a:r>
             <a:endParaRPr lang="en-US" sz="4000" dirty="0"/>
           </a:p>
@@ -14382,7 +14660,7 @@
                 <a:ea typeface="Times New Roman" pitchFamily="34" charset="-122"/>
                 <a:cs typeface="Times New Roman" pitchFamily="34" charset="-120"/>
               </a:rPr>
-              <a:t>Stones hit each other and become smaller.</a:t>
+              <a:t>Upper, middle and lower course.</a:t>
             </a:r>
             <a:endParaRPr lang="en-US" sz="4000" dirty="0"/>
           </a:p>
@@ -14733,7 +15011,7 @@
                 <a:ea typeface="Calibri" pitchFamily="34" charset="-122"/>
                 <a:cs typeface="Calibri" pitchFamily="34" charset="-120"/>
               </a:rPr>
-              <a:t>REMEDIATION</a:t>
+              <a:t>FORMATIVE EVALUATION</a:t>
             </a:r>
             <a:endParaRPr lang="en-US" sz="1400" dirty="0"/>
           </a:p>
@@ -14756,7 +15034,7 @@
         <p:spPr>
           <a:xfrm>
             <a:off x="0" y="658368"/>
-            <a:ext cx="1463040" cy="5833872"/>
+            <a:ext cx="5120640" cy="5833872"/>
           </a:xfrm>
           <a:prstGeom prst="rect">
             <a:avLst/>
@@ -14771,8 +15049,8 @@
         </p:nvSpPr>
         <p:spPr>
           <a:xfrm>
-            <a:off x="1691640" y="1005840"/>
-            <a:ext cx="10180015" cy="731520"/>
+            <a:off x="5349240" y="1005840"/>
+            <a:ext cx="6522415" cy="731520"/>
           </a:xfrm>
           <a:prstGeom prst="rect">
             <a:avLst/>
@@ -14798,7 +15076,7 @@
                 <a:ea typeface="Times New Roman" pitchFamily="34" charset="-122"/>
                 <a:cs typeface="Times New Roman" pitchFamily="34" charset="-120"/>
               </a:rPr>
-              <a:t>Remediation</a:t>
+              <a:t>Evaluation 2</a:t>
             </a:r>
             <a:endParaRPr lang="en-US" sz="3600" dirty="0"/>
           </a:p>
@@ -14812,8 +15090,8 @@
         </p:nvSpPr>
         <p:spPr>
           <a:xfrm>
-            <a:off x="1691640" y="1783080"/>
-            <a:ext cx="10180015" cy="4663440"/>
+            <a:off x="5349240" y="1783080"/>
+            <a:ext cx="6522415" cy="4663440"/>
           </a:xfrm>
           <a:prstGeom prst="rect">
             <a:avLst/>
@@ -14832,7 +15110,7 @@
               <a:buNone/>
             </a:pPr>
             <a:r>
-              <a:rPr lang="en-US" sz="4000" b="1" dirty="0">
+              <a:rPr lang="en-US" sz="4000" dirty="0">
                 <a:solidFill>
                   <a:srgbClr val="111111"/>
                 </a:solidFill>
@@ -14840,73 +15118,7 @@
                 <a:ea typeface="Times New Roman" pitchFamily="34" charset="-122"/>
                 <a:cs typeface="Times New Roman" pitchFamily="34" charset="-120"/>
               </a:rPr>
-              <a:t>Fill in the blanks:</a:t>
-            </a:r>
-            <a:endParaRPr lang="en-US" sz="4000" dirty="0"/>
-          </a:p>
-          <a:p>
-            <a:pPr algn="l" marL="342900" indent="-342900">
-              <a:spcAft>
-                <a:spcPts val="800"/>
-              </a:spcAft>
-              <a:buSzPct val="100000"/>
-              <a:buFont typeface="+mj-lt"/>
-              <a:buAutoNum type="arabicPeriod" startAt="1"/>
-            </a:pPr>
-            <a:r>
-              <a:rPr lang="en-US" sz="4000" dirty="0">
-                <a:solidFill>
-                  <a:srgbClr val="111111"/>
-                </a:solidFill>
-                <a:latin typeface="Times New Roman" pitchFamily="34" charset="0"/>
-                <a:ea typeface="Times New Roman" pitchFamily="34" charset="-122"/>
-                <a:cs typeface="Times New Roman" pitchFamily="34" charset="-120"/>
-              </a:rPr>
-              <a:t>The place where a river begins is its ______.</a:t>
-            </a:r>
-            <a:endParaRPr lang="en-US" sz="4000" dirty="0"/>
-          </a:p>
-          <a:p>
-            <a:pPr algn="l" marL="342900" indent="-342900">
-              <a:spcAft>
-                <a:spcPts val="800"/>
-              </a:spcAft>
-              <a:buSzPct val="100000"/>
-              <a:buFont typeface="+mj-lt"/>
-              <a:buAutoNum type="arabicPeriod" startAt="1"/>
-            </a:pPr>
-            <a:r>
-              <a:rPr lang="en-US" sz="4000" dirty="0">
-                <a:solidFill>
-                  <a:srgbClr val="111111"/>
-                </a:solidFill>
-                <a:latin typeface="Times New Roman" pitchFamily="34" charset="0"/>
-                <a:ea typeface="Times New Roman" pitchFamily="34" charset="-122"/>
-                <a:cs typeface="Times New Roman" pitchFamily="34" charset="-120"/>
-              </a:rPr>
-              <a:t>The material carried by a river is its ______.</a:t>
-            </a:r>
-            <a:endParaRPr lang="en-US" sz="4000" dirty="0"/>
-          </a:p>
-          <a:p>
-            <a:pPr algn="l" marL="342900" indent="-342900">
-              <a:spcAft>
-                <a:spcPts val="800"/>
-              </a:spcAft>
-              <a:buSzPct val="100000"/>
-              <a:buFont typeface="+mj-lt"/>
-              <a:buAutoNum type="arabicPeriod" startAt="1"/>
-            </a:pPr>
-            <a:r>
-              <a:rPr lang="en-US" sz="4000" dirty="0">
-                <a:solidFill>
-                  <a:srgbClr val="111111"/>
-                </a:solidFill>
-                <a:latin typeface="Times New Roman" pitchFamily="34" charset="0"/>
-                <a:ea typeface="Times New Roman" pitchFamily="34" charset="-122"/>
-                <a:cs typeface="Times New Roman" pitchFamily="34" charset="-120"/>
-              </a:rPr>
-              <a:t>Stones scraping the river bed is ______.</a:t>
+              <a:t>What is attrition?</a:t>
             </a:r>
             <a:endParaRPr lang="en-US" sz="4000" dirty="0"/>
           </a:p>
@@ -15018,7 +15230,7 @@
                 <a:ea typeface="Calibri" pitchFamily="34" charset="-122"/>
                 <a:cs typeface="Calibri" pitchFamily="34" charset="-120"/>
               </a:rPr>
-              <a:t>HOMEWORK</a:t>
+              <a:t>FORMATIVE EVALUATION</a:t>
             </a:r>
             <a:endParaRPr lang="en-US" sz="1400" dirty="0"/>
           </a:p>
@@ -15083,7 +15295,7 @@
                 <a:ea typeface="Times New Roman" pitchFamily="34" charset="-122"/>
                 <a:cs typeface="Times New Roman" pitchFamily="34" charset="-120"/>
               </a:rPr>
-              <a:t>Homework</a:t>
+              <a:t>Expected Answer</a:t>
             </a:r>
             <a:endParaRPr lang="en-US" sz="3600" dirty="0"/>
           </a:p>
@@ -15125,7 +15337,7 @@
                 <a:ea typeface="Times New Roman" pitchFamily="34" charset="-122"/>
                 <a:cs typeface="Times New Roman" pitchFamily="34" charset="-120"/>
               </a:rPr>
-              <a:t>Find a photo or a video of the Vina Falls or the Tello Falls near Ngaoundéré, or of the Kola Gorges near Guider. Describe the river and its valley in three sentences.</a:t>
+              <a:t>Stones hit each other and become smaller.</a:t>
             </a:r>
             <a:endParaRPr lang="en-US" sz="4000" dirty="0"/>
           </a:p>
@@ -15237,7 +15449,7 @@
                 <a:ea typeface="Calibri" pitchFamily="34" charset="-122"/>
                 <a:cs typeface="Calibri" pitchFamily="34" charset="-120"/>
               </a:rPr>
-              <a:t>NEXT LESSON</a:t>
+              <a:t>REMEDIATION</a:t>
             </a:r>
             <a:endParaRPr lang="en-US" sz="1400" dirty="0"/>
           </a:p>
@@ -15260,7 +15472,7 @@
         <p:spPr>
           <a:xfrm>
             <a:off x="0" y="658368"/>
-            <a:ext cx="5120640" cy="5833872"/>
+            <a:ext cx="1463040" cy="5833872"/>
           </a:xfrm>
           <a:prstGeom prst="rect">
             <a:avLst/>
@@ -15275,8 +15487,8 @@
         </p:nvSpPr>
         <p:spPr>
           <a:xfrm>
-            <a:off x="5349240" y="1005840"/>
-            <a:ext cx="6522415" cy="731520"/>
+            <a:off x="1691640" y="1005840"/>
+            <a:ext cx="10180015" cy="731520"/>
           </a:xfrm>
           <a:prstGeom prst="rect">
             <a:avLst/>
@@ -15302,7 +15514,7 @@
                 <a:ea typeface="Times New Roman" pitchFamily="34" charset="-122"/>
                 <a:cs typeface="Times New Roman" pitchFamily="34" charset="-120"/>
               </a:rPr>
-              <a:t>Next Lesson</a:t>
+              <a:t>Remediation</a:t>
             </a:r>
             <a:endParaRPr lang="en-US" sz="3600" dirty="0"/>
           </a:p>
@@ -15316,8 +15528,8 @@
         </p:nvSpPr>
         <p:spPr>
           <a:xfrm>
-            <a:off x="5349240" y="1783080"/>
-            <a:ext cx="6522415" cy="4663440"/>
+            <a:off x="1691640" y="1783080"/>
+            <a:ext cx="10180015" cy="4663440"/>
           </a:xfrm>
           <a:prstGeom prst="rect">
             <a:avLst/>
@@ -15326,10 +15538,10 @@
           <a:ln/>
         </p:spPr>
         <p:txBody>
-          <a:bodyPr wrap="square" lIns="0" tIns="0" rIns="0" bIns="0" rtlCol="0" anchor="ctr"/>
-          <a:lstStyle/>
-          <a:p>
-            <a:pPr algn="ctr" indent="0" marL="0">
+          <a:bodyPr wrap="square" lIns="0" tIns="0" rIns="0" bIns="0" rtlCol="0" anchor="t"/>
+          <a:lstStyle/>
+          <a:p>
+            <a:pPr algn="l" indent="0" marL="0">
               <a:spcAft>
                 <a:spcPts val="800"/>
               </a:spcAft>
@@ -15344,27 +15556,73 @@
                 <a:ea typeface="Times New Roman" pitchFamily="34" charset="-122"/>
                 <a:cs typeface="Times New Roman" pitchFamily="34" charset="-120"/>
               </a:rPr>
-              <a:t>Our next lesson will be on:</a:t>
+              <a:t>Fill in the blanks:</a:t>
             </a:r>
             <a:endParaRPr lang="en-US" sz="4000" dirty="0"/>
           </a:p>
           <a:p>
-            <a:pPr algn="ctr" indent="0" marL="0">
+            <a:pPr algn="l" marL="342900" indent="-342900">
               <a:spcAft>
                 <a:spcPts val="800"/>
               </a:spcAft>
-              <a:buNone/>
+              <a:buSzPct val="100000"/>
+              <a:buFont typeface="+mj-lt"/>
+              <a:buAutoNum type="arabicPeriod" startAt="1"/>
             </a:pPr>
             <a:r>
-              <a:rPr lang="en-US" sz="4000" b="1" dirty="0">
-                <a:solidFill>
-                  <a:srgbClr val="990011"/>
+              <a:rPr lang="en-US" sz="4000" dirty="0">
+                <a:solidFill>
+                  <a:srgbClr val="111111"/>
                 </a:solidFill>
                 <a:latin typeface="Times New Roman" pitchFamily="34" charset="0"/>
                 <a:ea typeface="Times New Roman" pitchFamily="34" charset="-122"/>
                 <a:cs typeface="Times New Roman" pitchFamily="34" charset="-120"/>
               </a:rPr>
-              <a:t>Lesson 19: The Upper Course of a River</a:t>
+              <a:t>The place where a river begins is its ______.</a:t>
+            </a:r>
+            <a:endParaRPr lang="en-US" sz="4000" dirty="0"/>
+          </a:p>
+          <a:p>
+            <a:pPr algn="l" marL="342900" indent="-342900">
+              <a:spcAft>
+                <a:spcPts val="800"/>
+              </a:spcAft>
+              <a:buSzPct val="100000"/>
+              <a:buFont typeface="+mj-lt"/>
+              <a:buAutoNum type="arabicPeriod" startAt="1"/>
+            </a:pPr>
+            <a:r>
+              <a:rPr lang="en-US" sz="4000" dirty="0">
+                <a:solidFill>
+                  <a:srgbClr val="111111"/>
+                </a:solidFill>
+                <a:latin typeface="Times New Roman" pitchFamily="34" charset="0"/>
+                <a:ea typeface="Times New Roman" pitchFamily="34" charset="-122"/>
+                <a:cs typeface="Times New Roman" pitchFamily="34" charset="-120"/>
+              </a:rPr>
+              <a:t>The material carried by a river is its ______.</a:t>
+            </a:r>
+            <a:endParaRPr lang="en-US" sz="4000" dirty="0"/>
+          </a:p>
+          <a:p>
+            <a:pPr algn="l" marL="342900" indent="-342900">
+              <a:spcAft>
+                <a:spcPts val="800"/>
+              </a:spcAft>
+              <a:buSzPct val="100000"/>
+              <a:buFont typeface="+mj-lt"/>
+              <a:buAutoNum type="arabicPeriod" startAt="1"/>
+            </a:pPr>
+            <a:r>
+              <a:rPr lang="en-US" sz="4000" dirty="0">
+                <a:solidFill>
+                  <a:srgbClr val="111111"/>
+                </a:solidFill>
+                <a:latin typeface="Times New Roman" pitchFamily="34" charset="0"/>
+                <a:ea typeface="Times New Roman" pitchFamily="34" charset="-122"/>
+                <a:cs typeface="Times New Roman" pitchFamily="34" charset="-120"/>
+              </a:rPr>
+              <a:t>Stones scraping the river bed is ______.</a:t>
             </a:r>
             <a:endParaRPr lang="en-US" sz="4000" dirty="0"/>
           </a:p>
@@ -15476,6 +15734,464 @@
                 <a:ea typeface="Calibri" pitchFamily="34" charset="-122"/>
                 <a:cs typeface="Calibri" pitchFamily="34" charset="-120"/>
               </a:rPr>
+              <a:t>HOMEWORK</a:t>
+            </a:r>
+            <a:endParaRPr lang="en-US" sz="1400" dirty="0"/>
+          </a:p>
+        </p:txBody>
+      </p:sp>
+      <p:pic>
+        <p:nvPicPr>
+          <p:cNvPr id="3" name="Image 0" descr="/home/claude/f4/img/minesec_sheet.png">    </p:cNvPr>
+          <p:cNvPicPr>
+            <a:picLocks noChangeAspect="1"/>
+          </p:cNvPicPr>
+          <p:nvPr/>
+        </p:nvPicPr>
+        <p:blipFill>
+          <a:blip r:embed="rId1"/>
+          <a:stretch>
+            <a:fillRect/>
+          </a:stretch>
+        </p:blipFill>
+        <p:spPr>
+          <a:xfrm>
+            <a:off x="0" y="658368"/>
+            <a:ext cx="5120640" cy="5833872"/>
+          </a:xfrm>
+          <a:prstGeom prst="rect">
+            <a:avLst/>
+          </a:prstGeom>
+        </p:spPr>
+      </p:pic>
+      <p:sp>
+        <p:nvSpPr>
+          <p:cNvPr id="4" name="Text 1"/>
+          <p:cNvSpPr/>
+          <p:nvPr/>
+        </p:nvSpPr>
+        <p:spPr>
+          <a:xfrm>
+            <a:off x="5349240" y="1005840"/>
+            <a:ext cx="6522415" cy="731520"/>
+          </a:xfrm>
+          <a:prstGeom prst="rect">
+            <a:avLst/>
+          </a:prstGeom>
+          <a:noFill/>
+          <a:ln/>
+        </p:spPr>
+        <p:txBody>
+          <a:bodyPr wrap="square" lIns="0" tIns="0" rIns="0" bIns="0" rtlCol="0" anchor="ctr">
+            <a:normAutofit/>
+          </a:bodyPr>
+          <a:lstStyle/>
+          <a:p>
+            <a:pPr algn="ctr" indent="0" marL="0">
+              <a:buNone/>
+            </a:pPr>
+            <a:r>
+              <a:rPr lang="en-US" sz="3600" b="1" dirty="0">
+                <a:solidFill>
+                  <a:srgbClr val="990011"/>
+                </a:solidFill>
+                <a:latin typeface="Times New Roman" pitchFamily="34" charset="0"/>
+                <a:ea typeface="Times New Roman" pitchFamily="34" charset="-122"/>
+                <a:cs typeface="Times New Roman" pitchFamily="34" charset="-120"/>
+              </a:rPr>
+              <a:t>Homework</a:t>
+            </a:r>
+            <a:endParaRPr lang="en-US" sz="3600" dirty="0"/>
+          </a:p>
+        </p:txBody>
+      </p:sp>
+      <p:sp>
+        <p:nvSpPr>
+          <p:cNvPr id="5" name="Text 2"/>
+          <p:cNvSpPr/>
+          <p:nvPr/>
+        </p:nvSpPr>
+        <p:spPr>
+          <a:xfrm>
+            <a:off x="5349240" y="1783080"/>
+            <a:ext cx="6522415" cy="4663440"/>
+          </a:xfrm>
+          <a:prstGeom prst="rect">
+            <a:avLst/>
+          </a:prstGeom>
+          <a:noFill/>
+          <a:ln/>
+        </p:spPr>
+        <p:txBody>
+          <a:bodyPr wrap="square" lIns="0" tIns="0" rIns="0" bIns="0" rtlCol="0" anchor="t"/>
+          <a:lstStyle/>
+          <a:p>
+            <a:pPr algn="l" indent="0" marL="0">
+              <a:spcAft>
+                <a:spcPts val="800"/>
+              </a:spcAft>
+              <a:buNone/>
+            </a:pPr>
+            <a:r>
+              <a:rPr lang="en-US" sz="4000" dirty="0">
+                <a:solidFill>
+                  <a:srgbClr val="111111"/>
+                </a:solidFill>
+                <a:latin typeface="Times New Roman" pitchFamily="34" charset="0"/>
+                <a:ea typeface="Times New Roman" pitchFamily="34" charset="-122"/>
+                <a:cs typeface="Times New Roman" pitchFamily="34" charset="-120"/>
+              </a:rPr>
+              <a:t>Find a photo or a video of the Vina Falls or the Tello Falls near Ngaoundéré, or of the Kola Gorges near Guider. Describe the river and its valley in three sentences.</a:t>
+            </a:r>
+            <a:endParaRPr lang="en-US" sz="4000" dirty="0"/>
+          </a:p>
+        </p:txBody>
+      </p:sp>
+      <p:sp>
+        <p:nvSpPr>
+          <p:cNvPr id="25" name="Slide Number Placeholder 0"/>
+          <p:cNvSpPr>
+            <a:spLocks noGrp="1"/>
+          </p:cNvSpPr>
+          <p:nvPr>
+            <p:ph type="sldNum" sz="quarter" idx="4294967295"/>
+          </p:nvPr>
+        </p:nvSpPr>
+        <p:spPr>
+          <a:xfrm>
+            <a:off x="27432" y="91440"/>
+            <a:ext cx="585216" cy="475488"/>
+          </a:xfrm>
+          <a:prstGeom prst="rect">
+            <a:avLst/>
+          </a:prstGeom>
+          <a:extLst>
+            <a:ext uri="{C572A759-6A51-4108-AA02-DFA0A04FC94B}">
+              <ma14:wrappingTextBoxFlag xmlns:ma14="http://schemas.microsoft.com/office/mac/drawingml/2011/main" val="0"/>
+            </a:ext>
+          </a:extLst>
+        </p:spPr>
+        <p:txBody>
+          <a:bodyPr/>
+          <a:lstStyle>
+            <a:lvl1pPr>
+              <a:defRPr sz="2000">
+                <a:solidFill>
+                  <a:srgbClr val="FFFFFF"/>
+                </a:solidFill>
+                <a:latin typeface="Calibri"/>
+                <a:ea typeface="Calibri"/>
+                <a:cs typeface="Calibri"/>
+              </a:defRPr>
+            </a:lvl1pPr>
+          </a:lstStyle>
+          <a:p>
+            <a:pPr algn="ctr"/>
+            <a:fld id="{F7021451-1387-4CA6-816F-3879F97B5CBC}" type="slidenum">
+              <a:rPr b="1" lang="en-US"/>
+              <a:t>43</a:t>
+            </a:fld>
+            <a:endParaRPr lang="en-US"/>
+          </a:p>
+        </p:txBody>
+      </p:sp>
+    </p:spTree>
+  </p:cSld>
+  <p:clrMapOvr>
+    <a:masterClrMapping/>
+  </p:clrMapOvr>
+</p:sld>
+</file>
+
+<file path=ppt/slides/slide44.xml><?xml version="1.0" encoding="utf-8"?>
+<p:sld xmlns:a="http://schemas.openxmlformats.org/drawingml/2006/main" xmlns:r="http://schemas.openxmlformats.org/officeDocument/2006/relationships" xmlns:p="http://schemas.openxmlformats.org/presentationml/2006/main">
+  <p:cSld name="Slide 44">
+    <p:spTree>
+      <p:nvGrpSpPr>
+        <p:cNvPr id="1" name=""/>
+        <p:cNvGrpSpPr/>
+        <p:nvPr/>
+      </p:nvGrpSpPr>
+      <p:grpSpPr>
+        <a:xfrm>
+          <a:off x="0" y="0"/>
+          <a:ext cx="0" cy="0"/>
+          <a:chOff x="0" y="0"/>
+          <a:chExt cx="0" cy="0"/>
+        </a:xfrm>
+      </p:grpSpPr>
+      <p:sp>
+        <p:nvSpPr>
+          <p:cNvPr id="2" name="Text 0"/>
+          <p:cNvSpPr/>
+          <p:nvPr/>
+        </p:nvSpPr>
+        <p:spPr>
+          <a:xfrm>
+            <a:off x="457200" y="713232"/>
+            <a:ext cx="11368735" cy="274320"/>
+          </a:xfrm>
+          <a:prstGeom prst="rect">
+            <a:avLst/>
+          </a:prstGeom>
+          <a:noFill/>
+          <a:ln/>
+        </p:spPr>
+        <p:txBody>
+          <a:bodyPr wrap="square" lIns="0" tIns="0" rIns="0" bIns="0" rtlCol="0" anchor="ctr"/>
+          <a:lstStyle/>
+          <a:p>
+            <a:pPr algn="r" indent="0" marL="0">
+              <a:buNone/>
+            </a:pPr>
+            <a:r>
+              <a:rPr lang="en-US" sz="1400" b="1" dirty="0">
+                <a:solidFill>
+                  <a:srgbClr val="1C3F6E"/>
+                </a:solidFill>
+                <a:latin typeface="Calibri" pitchFamily="34" charset="0"/>
+                <a:ea typeface="Calibri" pitchFamily="34" charset="-122"/>
+                <a:cs typeface="Calibri" pitchFamily="34" charset="-120"/>
+              </a:rPr>
+              <a:t>NEXT LESSON</a:t>
+            </a:r>
+            <a:endParaRPr lang="en-US" sz="1400" dirty="0"/>
+          </a:p>
+        </p:txBody>
+      </p:sp>
+      <p:pic>
+        <p:nvPicPr>
+          <p:cNvPr id="3" name="Image 0" descr="/home/claude/f4/img/minesec_sheet.png">    </p:cNvPr>
+          <p:cNvPicPr>
+            <a:picLocks noChangeAspect="1"/>
+          </p:cNvPicPr>
+          <p:nvPr/>
+        </p:nvPicPr>
+        <p:blipFill>
+          <a:blip r:embed="rId1"/>
+          <a:stretch>
+            <a:fillRect/>
+          </a:stretch>
+        </p:blipFill>
+        <p:spPr>
+          <a:xfrm>
+            <a:off x="0" y="658368"/>
+            <a:ext cx="5120640" cy="5833872"/>
+          </a:xfrm>
+          <a:prstGeom prst="rect">
+            <a:avLst/>
+          </a:prstGeom>
+        </p:spPr>
+      </p:pic>
+      <p:sp>
+        <p:nvSpPr>
+          <p:cNvPr id="4" name="Text 1"/>
+          <p:cNvSpPr/>
+          <p:nvPr/>
+        </p:nvSpPr>
+        <p:spPr>
+          <a:xfrm>
+            <a:off x="5349240" y="1005840"/>
+            <a:ext cx="6522415" cy="731520"/>
+          </a:xfrm>
+          <a:prstGeom prst="rect">
+            <a:avLst/>
+          </a:prstGeom>
+          <a:noFill/>
+          <a:ln/>
+        </p:spPr>
+        <p:txBody>
+          <a:bodyPr wrap="square" lIns="0" tIns="0" rIns="0" bIns="0" rtlCol="0" anchor="ctr">
+            <a:normAutofit/>
+          </a:bodyPr>
+          <a:lstStyle/>
+          <a:p>
+            <a:pPr algn="ctr" indent="0" marL="0">
+              <a:buNone/>
+            </a:pPr>
+            <a:r>
+              <a:rPr lang="en-US" sz="3600" b="1" dirty="0">
+                <a:solidFill>
+                  <a:srgbClr val="990011"/>
+                </a:solidFill>
+                <a:latin typeface="Times New Roman" pitchFamily="34" charset="0"/>
+                <a:ea typeface="Times New Roman" pitchFamily="34" charset="-122"/>
+                <a:cs typeface="Times New Roman" pitchFamily="34" charset="-120"/>
+              </a:rPr>
+              <a:t>Next Lesson</a:t>
+            </a:r>
+            <a:endParaRPr lang="en-US" sz="3600" dirty="0"/>
+          </a:p>
+        </p:txBody>
+      </p:sp>
+      <p:sp>
+        <p:nvSpPr>
+          <p:cNvPr id="5" name="Text 2"/>
+          <p:cNvSpPr/>
+          <p:nvPr/>
+        </p:nvSpPr>
+        <p:spPr>
+          <a:xfrm>
+            <a:off x="5349240" y="1783080"/>
+            <a:ext cx="6522415" cy="4663440"/>
+          </a:xfrm>
+          <a:prstGeom prst="rect">
+            <a:avLst/>
+          </a:prstGeom>
+          <a:noFill/>
+          <a:ln/>
+        </p:spPr>
+        <p:txBody>
+          <a:bodyPr wrap="square" lIns="0" tIns="0" rIns="0" bIns="0" rtlCol="0" anchor="ctr"/>
+          <a:lstStyle/>
+          <a:p>
+            <a:pPr algn="ctr" indent="0" marL="0">
+              <a:spcAft>
+                <a:spcPts val="800"/>
+              </a:spcAft>
+              <a:buNone/>
+            </a:pPr>
+            <a:r>
+              <a:rPr lang="en-US" sz="4000" b="1" dirty="0">
+                <a:solidFill>
+                  <a:srgbClr val="111111"/>
+                </a:solidFill>
+                <a:latin typeface="Times New Roman" pitchFamily="34" charset="0"/>
+                <a:ea typeface="Times New Roman" pitchFamily="34" charset="-122"/>
+                <a:cs typeface="Times New Roman" pitchFamily="34" charset="-120"/>
+              </a:rPr>
+              <a:t>Our next lesson will be on:</a:t>
+            </a:r>
+            <a:endParaRPr lang="en-US" sz="4000" dirty="0"/>
+          </a:p>
+          <a:p>
+            <a:pPr algn="ctr" indent="0" marL="0">
+              <a:spcAft>
+                <a:spcPts val="800"/>
+              </a:spcAft>
+              <a:buNone/>
+            </a:pPr>
+            <a:r>
+              <a:rPr lang="en-US" sz="4000" b="1" dirty="0">
+                <a:solidFill>
+                  <a:srgbClr val="990011"/>
+                </a:solidFill>
+                <a:latin typeface="Times New Roman" pitchFamily="34" charset="0"/>
+                <a:ea typeface="Times New Roman" pitchFamily="34" charset="-122"/>
+                <a:cs typeface="Times New Roman" pitchFamily="34" charset="-120"/>
+              </a:rPr>
+              <a:t>Lesson 19: The Upper Course of a River</a:t>
+            </a:r>
+            <a:endParaRPr lang="en-US" sz="4000" dirty="0"/>
+          </a:p>
+        </p:txBody>
+      </p:sp>
+      <p:sp>
+        <p:nvSpPr>
+          <p:cNvPr id="25" name="Slide Number Placeholder 0"/>
+          <p:cNvSpPr>
+            <a:spLocks noGrp="1"/>
+          </p:cNvSpPr>
+          <p:nvPr>
+            <p:ph type="sldNum" sz="quarter" idx="4294967295"/>
+          </p:nvPr>
+        </p:nvSpPr>
+        <p:spPr>
+          <a:xfrm>
+            <a:off x="27432" y="91440"/>
+            <a:ext cx="585216" cy="475488"/>
+          </a:xfrm>
+          <a:prstGeom prst="rect">
+            <a:avLst/>
+          </a:prstGeom>
+          <a:extLst>
+            <a:ext uri="{C572A759-6A51-4108-AA02-DFA0A04FC94B}">
+              <ma14:wrappingTextBoxFlag xmlns:ma14="http://schemas.microsoft.com/office/mac/drawingml/2011/main" val="0"/>
+            </a:ext>
+          </a:extLst>
+        </p:spPr>
+        <p:txBody>
+          <a:bodyPr/>
+          <a:lstStyle>
+            <a:lvl1pPr>
+              <a:defRPr sz="2000">
+                <a:solidFill>
+                  <a:srgbClr val="FFFFFF"/>
+                </a:solidFill>
+                <a:latin typeface="Calibri"/>
+                <a:ea typeface="Calibri"/>
+                <a:cs typeface="Calibri"/>
+              </a:defRPr>
+            </a:lvl1pPr>
+          </a:lstStyle>
+          <a:p>
+            <a:pPr algn="ctr"/>
+            <a:fld id="{F7021451-1387-4CA6-816F-3879F97B5CBC}" type="slidenum">
+              <a:rPr b="1" lang="en-US"/>
+              <a:t>44</a:t>
+            </a:fld>
+            <a:endParaRPr lang="en-US"/>
+          </a:p>
+        </p:txBody>
+      </p:sp>
+    </p:spTree>
+  </p:cSld>
+  <p:clrMapOvr>
+    <a:masterClrMapping/>
+  </p:clrMapOvr>
+</p:sld>
+</file>
+
+<file path=ppt/slides/slide45.xml><?xml version="1.0" encoding="utf-8"?>
+<p:sld xmlns:a="http://schemas.openxmlformats.org/drawingml/2006/main" xmlns:r="http://schemas.openxmlformats.org/officeDocument/2006/relationships" xmlns:p="http://schemas.openxmlformats.org/presentationml/2006/main">
+  <p:cSld name="Slide 45">
+    <p:spTree>
+      <p:nvGrpSpPr>
+        <p:cNvPr id="1" name=""/>
+        <p:cNvGrpSpPr/>
+        <p:nvPr/>
+      </p:nvGrpSpPr>
+      <p:grpSpPr>
+        <a:xfrm>
+          <a:off x="0" y="0"/>
+          <a:ext cx="0" cy="0"/>
+          <a:chOff x="0" y="0"/>
+          <a:chExt cx="0" cy="0"/>
+        </a:xfrm>
+      </p:grpSpPr>
+      <p:sp>
+        <p:nvSpPr>
+          <p:cNvPr id="2" name="Text 0"/>
+          <p:cNvSpPr/>
+          <p:nvPr/>
+        </p:nvSpPr>
+        <p:spPr>
+          <a:xfrm>
+            <a:off x="457200" y="713232"/>
+            <a:ext cx="11368735" cy="274320"/>
+          </a:xfrm>
+          <a:prstGeom prst="rect">
+            <a:avLst/>
+          </a:prstGeom>
+          <a:noFill/>
+          <a:ln/>
+        </p:spPr>
+        <p:txBody>
+          <a:bodyPr wrap="square" lIns="0" tIns="0" rIns="0" bIns="0" rtlCol="0" anchor="ctr"/>
+          <a:lstStyle/>
+          <a:p>
+            <a:pPr algn="r" indent="0" marL="0">
+              <a:buNone/>
+            </a:pPr>
+            <a:r>
+              <a:rPr lang="en-US" sz="1400" b="1" dirty="0">
+                <a:solidFill>
+                  <a:srgbClr val="1C3F6E"/>
+                </a:solidFill>
+                <a:latin typeface="Calibri" pitchFamily="34" charset="0"/>
+                <a:ea typeface="Calibri" pitchFamily="34" charset="-122"/>
+                <a:cs typeface="Calibri" pitchFamily="34" charset="-120"/>
+              </a:rPr>
               <a:t>BILINGUAL GAME</a:t>
             </a:r>
             <a:endParaRPr lang="en-US" sz="1400" dirty="0"/>
@@ -15523,7 +16239,7 @@
       </p:sp>
       <p:graphicFrame>
         <p:nvGraphicFramePr>
-          <p:cNvPr id="44" name="Table 0"/>
+          <p:cNvPr id="46" name="Table 0"/>
           <p:cNvGraphicFramePr>
             <a:graphicFrameLocks noGrp="1"/>
           </p:cNvGraphicFramePr>
@@ -16835,7 +17551,7 @@
             <a:pPr algn="ctr"/>
             <a:fld id="{F7021451-1387-4CA6-816F-3879F97B5CBC}" type="slidenum">
               <a:rPr b="1" lang="en-US"/>
-              <a:t>43</a:t>
+              <a:t>45</a:t>
             </a:fld>
             <a:endParaRPr lang="en-US"/>
           </a:p>
@@ -16849,9 +17565,9 @@
 </p:sld>
 </file>
 
-<file path=ppt/slides/slide44.xml><?xml version="1.0" encoding="utf-8"?>
+<file path=ppt/slides/slide46.xml><?xml version="1.0" encoding="utf-8"?>
 <p:sld xmlns:a="http://schemas.openxmlformats.org/drawingml/2006/main" xmlns:r="http://schemas.openxmlformats.org/officeDocument/2006/relationships" xmlns:p="http://schemas.openxmlformats.org/presentationml/2006/main">
-  <p:cSld name="Slide 44">
+  <p:cSld name="Slide 46">
     <p:spTree>
       <p:nvGrpSpPr>
         <p:cNvPr id="1" name=""/>
@@ -16946,7 +17662,7 @@
       </p:sp>
       <p:graphicFrame>
         <p:nvGraphicFramePr>
-          <p:cNvPr id="45" name="Table 0"/>
+          <p:cNvPr id="47" name="Table 0"/>
           <p:cNvGraphicFramePr>
             <a:graphicFrameLocks noGrp="1"/>
           </p:cNvGraphicFramePr>
@@ -17568,7 +18284,7 @@
             <a:pPr algn="ctr"/>
             <a:fld id="{F7021451-1387-4CA6-816F-3879F97B5CBC}" type="slidenum">
               <a:rPr b="1" lang="en-US"/>
-              <a:t>44</a:t>
+              <a:t>46</a:t>
             </a:fld>
             <a:endParaRPr lang="en-US"/>
           </a:p>
@@ -17582,9 +18298,9 @@
 </p:sld>
 </file>
 
-<file path=ppt/slides/slide45.xml><?xml version="1.0" encoding="utf-8"?>
+<file path=ppt/slides/slide47.xml><?xml version="1.0" encoding="utf-8"?>
 <p:sld xmlns:a="http://schemas.openxmlformats.org/drawingml/2006/main" xmlns:r="http://schemas.openxmlformats.org/officeDocument/2006/relationships" xmlns:p="http://schemas.openxmlformats.org/presentationml/2006/main">
-  <p:cSld name="Slide 45">
+  <p:cSld name="Slide 47">
     <p:spTree>
       <p:nvGrpSpPr>
         <p:cNvPr id="1" name=""/>
@@ -17679,7 +18395,7 @@
       </p:sp>
       <p:graphicFrame>
         <p:nvGraphicFramePr>
-          <p:cNvPr id="46" name="Table 0"/>
+          <p:cNvPr id="48" name="Table 0"/>
           <p:cNvGraphicFramePr>
             <a:graphicFrameLocks noGrp="1"/>
           </p:cNvGraphicFramePr>
@@ -17789,7 +18505,7 @@
                           <a:ea typeface="Calibri" pitchFamily="34" charset="-122"/>
                           <a:cs typeface="Calibri" pitchFamily="34" charset="-120"/>
                         </a:rPr>
-                        <a:t>DEFINITIONS; The Long Profile of a River; Mechanisms of River Erosion.</a:t>
+                        <a:t>DEFINITIONS; Illustration of the Long Profile; Mechanisms of River Erosion.</a:t>
                       </a:r>
                       <a:endParaRPr lang="en-US" sz="1600" dirty="0">
                         <a:latin typeface="Calibri" charset="0"/>
@@ -18439,7 +19155,7 @@
             <a:pPr algn="ctr"/>
             <a:fld id="{F7021451-1387-4CA6-816F-3879F97B5CBC}" type="slidenum">
               <a:rPr b="1" lang="en-US"/>
-              <a:t>45</a:t>
+              <a:t>47</a:t>
             </a:fld>
             <a:endParaRPr lang="en-US"/>
           </a:p>
@@ -18453,9 +19169,9 @@
 </p:sld>
 </file>
 
-<file path=ppt/slides/slide46.xml><?xml version="1.0" encoding="utf-8"?>
+<file path=ppt/slides/slide48.xml><?xml version="1.0" encoding="utf-8"?>
 <p:sld xmlns:a="http://schemas.openxmlformats.org/drawingml/2006/main" xmlns:r="http://schemas.openxmlformats.org/officeDocument/2006/relationships" xmlns:p="http://schemas.openxmlformats.org/presentationml/2006/main">
-  <p:cSld name="Slide 46">
+  <p:cSld name="Slide 48">
     <p:spTree>
       <p:nvGrpSpPr>
         <p:cNvPr id="1" name=""/>
@@ -18653,7 +19369,7 @@
                 <a:ea typeface="Calibri" pitchFamily="34" charset="-122"/>
                 <a:cs typeface="Calibri" pitchFamily="34" charset="-120"/>
               </a:rPr>
-              <a:t>Without the projector (Activity 2): write the four words on the board.</a:t>
+              <a:t>Without the projector (Activity 2): rub two stones together.</a:t>
             </a:r>
             <a:endParaRPr lang="en-US" sz="2000" dirty="0"/>
           </a:p>
@@ -18674,7 +19390,7 @@
                 <a:ea typeface="Calibri" pitchFamily="34" charset="-122"/>
                 <a:cs typeface="Calibri" pitchFamily="34" charset="-120"/>
               </a:rPr>
-              <a:t>Without the projector (Activity 3): shake soil in a bottle of water.</a:t>
+              <a:t>Without the projector (Activity 3): describe the Benue in the rainy season.</a:t>
             </a:r>
             <a:endParaRPr lang="en-US" sz="2000" dirty="0"/>
           </a:p>
@@ -18722,7 +19438,7 @@
             <a:pPr algn="ctr"/>
             <a:fld id="{F7021451-1387-4CA6-816F-3879F97B5CBC}" type="slidenum">
               <a:rPr b="1" lang="en-US"/>
-              <a:t>46</a:t>
+              <a:t>48</a:t>
             </a:fld>
             <a:endParaRPr lang="en-US"/>
           </a:p>
@@ -18736,9 +19452,9 @@
 </p:sld>
 </file>
 
-<file path=ppt/slides/slide47.xml><?xml version="1.0" encoding="utf-8"?>
+<file path=ppt/slides/slide49.xml><?xml version="1.0" encoding="utf-8"?>
 <p:sld xmlns:a="http://schemas.openxmlformats.org/drawingml/2006/main" xmlns:r="http://schemas.openxmlformats.org/officeDocument/2006/relationships" xmlns:p="http://schemas.openxmlformats.org/presentationml/2006/main">
-  <p:cSld name="Slide 47">
+  <p:cSld name="Slide 49">
     <p:spTree>
       <p:nvGrpSpPr>
         <p:cNvPr id="1" name=""/>
@@ -19005,7 +19721,7 @@
             <a:pPr algn="ctr"/>
             <a:fld id="{F7021451-1387-4CA6-816F-3879F97B5CBC}" type="slidenum">
               <a:rPr b="1" lang="en-US"/>
-              <a:t>47</a:t>
+              <a:t>49</a:t>
             </a:fld>
             <a:endParaRPr lang="en-US"/>
           </a:p>

--- a/lecons/F3/22_FORM4_LESSON18_Action_of_Rivers.pptx
+++ b/lecons/F3/22_FORM4_LESSON18_Action_of_Rivers.pptx
@@ -12199,7 +12199,7 @@
               <a:buNone/>
             </a:pPr>
             <a:r>
-              <a:rPr lang="en-US" sz="4000" b="1" dirty="0">
+              <a:rPr lang="en-US" sz="3200" b="1" dirty="0">
                 <a:solidFill>
                   <a:srgbClr val="111111"/>
                 </a:solidFill>
@@ -12209,7 +12209,7 @@
               </a:rPr>
               <a:t>Topic: Denudation Processes, Landforms and Impacts on Man</a:t>
             </a:r>
-            <a:endParaRPr lang="en-US" sz="4000" dirty="0"/>
+            <a:endParaRPr lang="en-US" sz="3200" dirty="0"/>
           </a:p>
           <a:p>
             <a:pPr algn="l" indent="0" marL="0">
@@ -12219,7 +12219,7 @@
               <a:buNone/>
             </a:pPr>
             <a:r>
-              <a:rPr lang="en-US" sz="4000" b="1" dirty="0">
+              <a:rPr lang="en-US" sz="3200" b="1" dirty="0">
                 <a:solidFill>
                   <a:srgbClr val="111111"/>
                 </a:solidFill>
@@ -12229,7 +12229,7 @@
               </a:rPr>
               <a:t>Sub-topic: The Work of Rivers on the Landscape and Impacts on Man</a:t>
             </a:r>
-            <a:endParaRPr lang="en-US" sz="4000" dirty="0"/>
+            <a:endParaRPr lang="en-US" sz="3200" dirty="0"/>
           </a:p>
           <a:p>
             <a:pPr algn="l" indent="0" marL="0">
@@ -12239,7 +12239,7 @@
               <a:buNone/>
             </a:pPr>
             <a:r>
-              <a:rPr lang="en-US" sz="4000" b="1" dirty="0">
+              <a:rPr lang="en-US" sz="3200" b="1" dirty="0">
                 <a:solidFill>
                   <a:srgbClr val="990011"/>
                 </a:solidFill>
@@ -12249,7 +12249,7 @@
               </a:rPr>
               <a:t>Lesson 18: Action of Rivers on the Landscape</a:t>
             </a:r>
-            <a:endParaRPr lang="en-US" sz="4000" dirty="0"/>
+            <a:endParaRPr lang="en-US" sz="3200" dirty="0"/>
           </a:p>
         </p:txBody>
       </p:sp>

--- a/lecons/F3/22_FORM4_LESSON18_Action_of_Rivers.pptx
+++ b/lecons/F3/22_FORM4_LESSON18_Action_of_Rivers.pptx
@@ -2838,7 +2838,7 @@
           <a:p>
             <a:r>
               <a:rPr lang="en-US" dirty="0"/>
-              <a:t>Let us copy Illustration of the Long Profile. The long profile of a river has three courses. Copy the point on The upper course on the left, then draw the diagram on the right: the long profile of a river. Give it a title and label it clearly.</a:t>
+              <a:t>Let us copy Illustration of the Long Profile. The three courses and the shape of the long profile are the following. Copy the point on The upper course on the left, then draw the diagram on the right: the long profile of a river. Give it a title and label it clearly.</a:t>
             </a:r>
             <a:endParaRPr lang="en-US" dirty="0"/>
           </a:p>
@@ -13008,7 +13008,7 @@
                 <a:ea typeface="Times New Roman" pitchFamily="34" charset="-122"/>
                 <a:cs typeface="Times New Roman" pitchFamily="34" charset="-120"/>
               </a:rPr>
-              <a:t>The long profile of a river has three courses:</a:t>
+              <a:t>The three courses and the shape of the long profile are the following:</a:t>
             </a:r>
             <a:endParaRPr lang="en-US" sz="3600" dirty="0"/>
           </a:p>

--- a/lecons/F3/22_FORM4_LESSON18_Action_of_Rivers.pptx
+++ b/lecons/F3/22_FORM4_LESSON18_Action_of_Rivers.pptx
@@ -3454,7 +3454,7 @@
           <a:p>
             <a:r>
               <a:rPr lang="en-US" dirty="0"/>
-              <a:t>Before we start the new lesson, let us correct the homework I gave you at the end of Further Study 2: The Impact of Weathering on the Environment. The question was: Watch the Benue or a stream near your home. Write how fast the water flows, what it carries, and whether it is wide or narrow. Take out your exercise books.</a:t>
+              <a:t>Before we start the new lesson, let us correct the homework I gave you at the end of Further Study 2: The Impact of Weathering on the Environment. The question was: Name the three courses of a river. Take out your exercise books.</a:t>
             </a:r>
             <a:endParaRPr lang="en-US" dirty="0"/>
           </a:p>
@@ -3806,7 +3806,7 @@
           <a:p>
             <a:r>
               <a:rPr lang="en-US" dirty="0"/>
-              <a:t>For your homework: Find a photo or a video of the Vina Falls or the Tello Falls near Ngaoundéré, or of the Kola Gorges near Guider. Describe the river and its valley in three sentences. We shall correct it at the beginning of our next lesson.</a:t>
+              <a:t>For your homework: Name two landforms of the upper course of a river. We shall correct it at the beginning of our next lesson.</a:t>
             </a:r>
             <a:endParaRPr lang="en-US" dirty="0"/>
           </a:p>
@@ -4422,7 +4422,7 @@
           <a:p>
             <a:r>
               <a:rPr lang="en-US" dirty="0"/>
-              <a:t>Here is a good answer. Answers vary. Example: the Benue flows slowly and is wide in the dry season; in the rainy season it flows fast, is brown with mud and carries branches and sand. Compare it with your own answer and correct your work in red.</a:t>
+              <a:t>Here is a good answer. The upper, middle and lower courses. Compare it with your own answer and correct your work in red.</a:t>
             </a:r>
             <a:endParaRPr lang="en-US" dirty="0"/>
           </a:p>
@@ -14795,7 +14795,7 @@
         <p:spPr>
           <a:xfrm>
             <a:off x="0" y="658368"/>
-            <a:ext cx="3840480" cy="5833872"/>
+            <a:ext cx="5120640" cy="5833872"/>
           </a:xfrm>
           <a:prstGeom prst="rect">
             <a:avLst/>
@@ -14810,8 +14810,8 @@
         </p:nvSpPr>
         <p:spPr>
           <a:xfrm>
-            <a:off x="4069080" y="1005840"/>
-            <a:ext cx="7802575" cy="731520"/>
+            <a:off x="5349240" y="1005840"/>
+            <a:ext cx="6522415" cy="731520"/>
           </a:xfrm>
           <a:prstGeom prst="rect">
             <a:avLst/>
@@ -14851,8 +14851,8 @@
         </p:nvSpPr>
         <p:spPr>
           <a:xfrm>
-            <a:off x="4069080" y="1783080"/>
-            <a:ext cx="7802575" cy="4663440"/>
+            <a:off x="5349240" y="1783080"/>
+            <a:ext cx="6522415" cy="4663440"/>
           </a:xfrm>
           <a:prstGeom prst="rect">
             <a:avLst/>
@@ -14899,7 +14899,7 @@
                 <a:ea typeface="Times New Roman" pitchFamily="34" charset="-122"/>
                 <a:cs typeface="Times New Roman" pitchFamily="34" charset="-120"/>
               </a:rPr>
-              <a:t>Watch the Benue or a stream near your home. Write how fast the water flows, what it carries, and whether it is wide or narrow.</a:t>
+              <a:t>Name the three courses of a river.</a:t>
             </a:r>
             <a:endParaRPr lang="en-US" sz="4000" dirty="0"/>
           </a:p>
@@ -15841,7 +15841,7 @@
                 <a:ea typeface="Times New Roman" pitchFamily="34" charset="-122"/>
                 <a:cs typeface="Times New Roman" pitchFamily="34" charset="-120"/>
               </a:rPr>
-              <a:t>Find a photo or a video of the Vina Falls or the Tello Falls near Ngaoundéré, or of the Kola Gorges near Guider. Describe the river and its valley in three sentences.</a:t>
+              <a:t>Name two landforms of the upper course of a river.</a:t>
             </a:r>
             <a:endParaRPr lang="en-US" sz="4000" dirty="0"/>
           </a:p>
@@ -18781,7 +18781,7 @@
                           <a:ea typeface="Calibri" pitchFamily="34" charset="-122"/>
                           <a:cs typeface="Calibri" pitchFamily="34" charset="-120"/>
                         </a:rPr>
-                        <a:t>Find a photo or a video of the Vina Falls or the Tello Falls near Ngaoundéré, or of the Kola Gorges near Guider. Describe the river and its valley in three sentences.</a:t>
+                        <a:t>Name two landforms of the upper course of a river.</a:t>
                       </a:r>
                       <a:endParaRPr lang="en-US" sz="1600" dirty="0">
                         <a:latin typeface="Calibri" charset="0"/>
@@ -19892,7 +19892,7 @@
                 <a:ea typeface="Times New Roman" pitchFamily="34" charset="-122"/>
                 <a:cs typeface="Times New Roman" pitchFamily="34" charset="-120"/>
               </a:rPr>
-              <a:t>Answers vary. Example: the Benue flows slowly and is wide in the dry season; in the rainy season it flows fast, is brown with mud and carries branches and sand.</a:t>
+              <a:t>The upper, middle and lower courses.</a:t>
             </a:r>
             <a:endParaRPr lang="en-US" sz="4000" dirty="0"/>
           </a:p>
